--- a/Presentación/Pipeline RPA Oracle_Limpieza_Duda.pptx
+++ b/Presentación/Pipeline RPA Oracle_Limpieza_Duda.pptx
@@ -6,16 +6,18 @@
   </p:sldMasterIdLst>
   <p:sldIdLst>
     <p:sldId id="256" r:id="rId2"/>
-    <p:sldId id="257" r:id="rId3"/>
-    <p:sldId id="258" r:id="rId4"/>
-    <p:sldId id="259" r:id="rId5"/>
-    <p:sldId id="260" r:id="rId6"/>
-    <p:sldId id="261" r:id="rId7"/>
-    <p:sldId id="262" r:id="rId8"/>
-    <p:sldId id="263" r:id="rId9"/>
-    <p:sldId id="264" r:id="rId10"/>
-    <p:sldId id="265" r:id="rId11"/>
-    <p:sldId id="266" r:id="rId12"/>
+    <p:sldId id="258" r:id="rId3"/>
+    <p:sldId id="257" r:id="rId4"/>
+    <p:sldId id="263" r:id="rId5"/>
+    <p:sldId id="259" r:id="rId6"/>
+    <p:sldId id="260" r:id="rId7"/>
+    <p:sldId id="261" r:id="rId8"/>
+    <p:sldId id="262" r:id="rId9"/>
+    <p:sldId id="267" r:id="rId10"/>
+    <p:sldId id="264" r:id="rId11"/>
+    <p:sldId id="268" r:id="rId12"/>
+    <p:sldId id="265" r:id="rId13"/>
+    <p:sldId id="266" r:id="rId14"/>
   </p:sldIdLst>
   <p:sldSz cx="12192000" cy="6858000"/>
   <p:notesSz cx="6858000" cy="9144000"/>
@@ -3215,7 +3217,7 @@
         <p:spPr>
           <a:xfrm>
             <a:off x="2524125" y="3744217"/>
-            <a:ext cx="7143750" cy="609600"/>
+            <a:ext cx="7143750" cy="281616"/>
           </a:xfrm>
           <a:prstGeom prst="rect">
             <a:avLst/>
@@ -3234,13 +3236,130 @@
               </a:lnSpc>
             </a:pPr>
             <a:r>
-              <a:rPr sz="1500" b="0" i="0" u="none">
+              <a:rPr sz="1500" b="0" i="0" u="none" dirty="0" err="1">
                 <a:solidFill>
                   <a:srgbClr val="94A3B8"/>
                 </a:solidFill>
                 <a:latin typeface="Inter"/>
               </a:rPr>
-              <a:t>Arquitectura del pipeline automatizado: Desde datos crudos cargados por RPA en Oracle hasta vistas analíticas optimizadas con Python.</a:t>
+              <a:t>Arquitectura</a:t>
+            </a:r>
+            <a:r>
+              <a:rPr sz="1500" b="0" i="0" u="none" dirty="0">
+                <a:solidFill>
+                  <a:srgbClr val="94A3B8"/>
+                </a:solidFill>
+                <a:latin typeface="Inter"/>
+              </a:rPr>
+              <a:t> del pipeline </a:t>
+            </a:r>
+            <a:r>
+              <a:rPr sz="1500" b="0" i="0" u="none" dirty="0" err="1">
+                <a:solidFill>
+                  <a:srgbClr val="94A3B8"/>
+                </a:solidFill>
+                <a:latin typeface="Inter"/>
+              </a:rPr>
+              <a:t>automatizado</a:t>
+            </a:r>
+            <a:r>
+              <a:rPr sz="1500" b="0" i="0" u="none" dirty="0">
+                <a:solidFill>
+                  <a:srgbClr val="94A3B8"/>
+                </a:solidFill>
+                <a:latin typeface="Inter"/>
+              </a:rPr>
+              <a:t>: </a:t>
+            </a:r>
+            <a:r>
+              <a:rPr sz="1500" b="0" i="0" u="none" dirty="0" err="1">
+                <a:solidFill>
+                  <a:srgbClr val="94A3B8"/>
+                </a:solidFill>
+                <a:latin typeface="Inter"/>
+              </a:rPr>
+              <a:t>Desde</a:t>
+            </a:r>
+            <a:r>
+              <a:rPr sz="1500" b="0" i="0" u="none" dirty="0">
+                <a:solidFill>
+                  <a:srgbClr val="94A3B8"/>
+                </a:solidFill>
+                <a:latin typeface="Inter"/>
+              </a:rPr>
+              <a:t> </a:t>
+            </a:r>
+            <a:r>
+              <a:rPr sz="1500" b="0" i="0" u="none" dirty="0" err="1">
+                <a:solidFill>
+                  <a:srgbClr val="94A3B8"/>
+                </a:solidFill>
+                <a:latin typeface="Inter"/>
+              </a:rPr>
+              <a:t>datos</a:t>
+            </a:r>
+            <a:r>
+              <a:rPr sz="1500" b="0" i="0" u="none" dirty="0">
+                <a:solidFill>
+                  <a:srgbClr val="94A3B8"/>
+                </a:solidFill>
+                <a:latin typeface="Inter"/>
+              </a:rPr>
+              <a:t> crudos </a:t>
+            </a:r>
+            <a:r>
+              <a:rPr sz="1500" b="0" i="0" u="none" dirty="0" err="1">
+                <a:solidFill>
+                  <a:srgbClr val="94A3B8"/>
+                </a:solidFill>
+                <a:latin typeface="Inter"/>
+              </a:rPr>
+              <a:t>cargados</a:t>
+            </a:r>
+            <a:r>
+              <a:rPr sz="1500" b="0" i="0" u="none" dirty="0">
+                <a:solidFill>
+                  <a:srgbClr val="94A3B8"/>
+                </a:solidFill>
+                <a:latin typeface="Inter"/>
+              </a:rPr>
+              <a:t> </a:t>
+            </a:r>
+            <a:r>
+              <a:rPr sz="1500" b="0" i="0" u="none" dirty="0" err="1">
+                <a:solidFill>
+                  <a:srgbClr val="94A3B8"/>
+                </a:solidFill>
+                <a:latin typeface="Inter"/>
+              </a:rPr>
+              <a:t>por</a:t>
+            </a:r>
+            <a:r>
+              <a:rPr sz="1500" b="0" i="0" u="none" dirty="0">
+                <a:solidFill>
+                  <a:srgbClr val="94A3B8"/>
+                </a:solidFill>
+                <a:latin typeface="Inter"/>
+              </a:rPr>
+              <a:t> RPA </a:t>
+            </a:r>
+            <a:r>
+              <a:rPr sz="1500" b="0" i="0" u="none" dirty="0" err="1">
+                <a:solidFill>
+                  <a:srgbClr val="94A3B8"/>
+                </a:solidFill>
+                <a:latin typeface="Inter"/>
+              </a:rPr>
+              <a:t>en</a:t>
+            </a:r>
+            <a:r>
+              <a:rPr sz="1500" b="0" i="0" u="none" dirty="0">
+                <a:solidFill>
+                  <a:srgbClr val="94A3B8"/>
+                </a:solidFill>
+                <a:latin typeface="Inter"/>
+              </a:rPr>
+              <a:t> Oracle</a:t>
             </a:r>
           </a:p>
         </p:txBody>
@@ -3401,17 +3520,183 @@
         </p:blipFill>
         <p:spPr>
           <a:xfrm>
-            <a:off x="762000" y="2663279"/>
-            <a:ext cx="5143500" cy="2194321"/>
+            <a:off x="6286500" y="1950690"/>
+            <a:ext cx="5143500" cy="3619500"/>
           </a:xfrm>
           <a:prstGeom prst="rect">
             <a:avLst/>
           </a:prstGeom>
         </p:spPr>
       </p:pic>
+      <p:sp>
+        <p:nvSpPr>
+          <p:cNvPr id="4" name="TextBox 3"/>
+          <p:cNvSpPr txBox="1"/>
+          <p:nvPr/>
+        </p:nvSpPr>
+        <p:spPr>
+          <a:xfrm>
+            <a:off x="762000" y="2173783"/>
+            <a:ext cx="5400675" cy="276225"/>
+          </a:xfrm>
+          <a:prstGeom prst="rect">
+            <a:avLst/>
+          </a:prstGeom>
+          <a:noFill/>
+        </p:spPr>
+        <p:txBody>
+          <a:bodyPr wrap="square" lIns="257175" tIns="0" rIns="0" bIns="0" anchor="t">
+            <a:spAutoFit/>
+          </a:bodyPr>
+          <a:lstStyle/>
+          <a:p>
+            <a:pPr algn="l"/>
+            <a:r>
+              <a:rPr sz="1404" b="1" i="0" u="none">
+                <a:solidFill>
+                  <a:srgbClr val="E11D48"/>
+                </a:solidFill>
+                <a:latin typeface="Poppins"/>
+              </a:rPr>
+              <a:t>Corrupción de Nombres en INEC</a:t>
+            </a:r>
+          </a:p>
+        </p:txBody>
+      </p:sp>
+      <p:sp>
+        <p:nvSpPr>
+          <p:cNvPr id="5" name="TextBox 4"/>
+          <p:cNvSpPr txBox="1"/>
+          <p:nvPr/>
+        </p:nvSpPr>
+        <p:spPr>
+          <a:xfrm>
+            <a:off x="762000" y="2602408"/>
+            <a:ext cx="5143500" cy="975121"/>
+          </a:xfrm>
+          <a:prstGeom prst="rect">
+            <a:avLst/>
+          </a:prstGeom>
+          <a:noFill/>
+        </p:spPr>
+        <p:txBody>
+          <a:bodyPr wrap="square" lIns="0" tIns="0" rIns="0" bIns="0" anchor="t">
+            <a:spAutoFit/>
+          </a:bodyPr>
+          <a:lstStyle/>
+          <a:p>
+            <a:pPr algn="l">
+              <a:lnSpc>
+                <a:spcPts val="1920"/>
+              </a:lnSpc>
+            </a:pPr>
+            <a:r>
+              <a:rPr sz="1200" b="0" i="0" u="none">
+                <a:solidFill>
+                  <a:srgbClr val="475569"/>
+                </a:solidFill>
+                <a:latin typeface="Inter"/>
+              </a:rPr>
+              <a:t>El indicador INEC_ENEMDU_POBLACIONES importaba caracteres corruptos (ej. </a:t>
+            </a:r>
+            <a:r>
+              <a:rPr sz="1200" b="0" i="0" u="none">
+                <a:solidFill>
+                  <a:srgbClr val="0F172A"/>
+                </a:solidFill>
+                <a:latin typeface="Inter SemiBold"/>
+              </a:rPr>
+              <a:t>"Poblacin Total"</a:t>
+            </a:r>
+            <a:r>
+              <a:rPr sz="1200" b="0" i="0" u="none">
+                <a:solidFill>
+                  <a:srgbClr val="475569"/>
+                </a:solidFill>
+                <a:latin typeface="Inter"/>
+              </a:rPr>
+              <a:t>) debido a la omisión de la configuración del set de caracteres adecuado durante la carga de SQL*Plus original.</a:t>
+            </a:r>
+          </a:p>
+        </p:txBody>
+      </p:sp>
+      <p:sp>
+        <p:nvSpPr>
+          <p:cNvPr id="6" name="TextBox 5"/>
+          <p:cNvSpPr txBox="1"/>
+          <p:nvPr/>
+        </p:nvSpPr>
+        <p:spPr>
+          <a:xfrm>
+            <a:off x="762000" y="3806130"/>
+            <a:ext cx="5400675" cy="276225"/>
+          </a:xfrm>
+          <a:prstGeom prst="rect">
+            <a:avLst/>
+          </a:prstGeom>
+          <a:noFill/>
+        </p:spPr>
+        <p:txBody>
+          <a:bodyPr wrap="square" lIns="257175" tIns="0" rIns="0" bIns="0" anchor="t">
+            <a:spAutoFit/>
+          </a:bodyPr>
+          <a:lstStyle/>
+          <a:p>
+            <a:pPr algn="l"/>
+            <a:r>
+              <a:rPr sz="1404" b="1" i="0" u="none">
+                <a:solidFill>
+                  <a:srgbClr val="0D9488"/>
+                </a:solidFill>
+                <a:latin typeface="Poppins"/>
+              </a:rPr>
+              <a:t>Acción Correctiva Aplicada</a:t>
+            </a:r>
+          </a:p>
+        </p:txBody>
+      </p:sp>
+      <p:sp>
+        <p:nvSpPr>
+          <p:cNvPr id="7" name="TextBox 6"/>
+          <p:cNvSpPr txBox="1"/>
+          <p:nvPr/>
+        </p:nvSpPr>
+        <p:spPr>
+          <a:xfrm>
+            <a:off x="762000" y="4234755"/>
+            <a:ext cx="5143500" cy="731341"/>
+          </a:xfrm>
+          <a:prstGeom prst="rect">
+            <a:avLst/>
+          </a:prstGeom>
+          <a:noFill/>
+        </p:spPr>
+        <p:txBody>
+          <a:bodyPr wrap="square" lIns="0" tIns="0" rIns="0" bIns="0" anchor="t">
+            <a:spAutoFit/>
+          </a:bodyPr>
+          <a:lstStyle/>
+          <a:p>
+            <a:pPr algn="l">
+              <a:lnSpc>
+                <a:spcPts val="1920"/>
+              </a:lnSpc>
+            </a:pPr>
+            <a:r>
+              <a:rPr sz="1200" b="0" i="0" u="none">
+                <a:solidFill>
+                  <a:srgbClr val="475569"/>
+                </a:solidFill>
+                <a:latin typeface="Inter"/>
+              </a:rPr>
+              <a:t>La solución definitiva requiere forzar la variable de entorno del cliente SQL*Plus previa a la carga con la configuración de idioma y encoding regional adecuada para UTF-8:</a:t>
+            </a:r>
+          </a:p>
+        </p:txBody>
+      </p:sp>
       <p:pic>
         <p:nvPicPr>
-          <p:cNvPr id="4" name="Picture 3" descr="image.png"/>
+          <p:cNvPr id="8" name="Picture 7" descr="image.png"/>
           <p:cNvPicPr>
             <a:picLocks noChangeAspect="1"/>
           </p:cNvPicPr>
@@ -3425,204 +3710,17 @@
         </p:blipFill>
         <p:spPr>
           <a:xfrm>
-            <a:off x="6286500" y="3660427"/>
-            <a:ext cx="5143500" cy="1512391"/>
+            <a:off x="762000" y="2221408"/>
+            <a:ext cx="180975" cy="178296"/>
           </a:xfrm>
           <a:prstGeom prst="rect">
             <a:avLst/>
           </a:prstGeom>
         </p:spPr>
       </p:pic>
-      <p:sp>
-        <p:nvSpPr>
-          <p:cNvPr id="5" name="TextBox 4"/>
-          <p:cNvSpPr txBox="1"/>
-          <p:nvPr/>
-        </p:nvSpPr>
-        <p:spPr>
-          <a:xfrm>
-            <a:off x="1143000" y="3044279"/>
-            <a:ext cx="4381500" cy="685800"/>
-          </a:xfrm>
-          <a:prstGeom prst="rect">
-            <a:avLst/>
-          </a:prstGeom>
-          <a:noFill/>
-        </p:spPr>
-        <p:txBody>
-          <a:bodyPr wrap="square" lIns="0" tIns="0" rIns="0" bIns="0" anchor="t">
-            <a:spAutoFit/>
-          </a:bodyPr>
-          <a:lstStyle/>
-          <a:p>
-            <a:pPr algn="ctr">
-              <a:lnSpc>
-                <a:spcPts val="5400"/>
-              </a:lnSpc>
-            </a:pPr>
-            <a:r>
-              <a:rPr sz="5400" b="1" i="0" u="none">
-                <a:solidFill>
-                  <a:srgbClr val="14B8A6"/>
-                </a:solidFill>
-                <a:latin typeface="Poppins"/>
-              </a:rPr>
-              <a:t>1.67M</a:t>
-            </a:r>
-          </a:p>
-        </p:txBody>
-      </p:sp>
-      <p:sp>
-        <p:nvSpPr>
-          <p:cNvPr id="6" name="TextBox 5"/>
-          <p:cNvSpPr txBox="1"/>
-          <p:nvPr/>
-        </p:nvSpPr>
-        <p:spPr>
-          <a:xfrm>
-            <a:off x="1143000" y="3806279"/>
-            <a:ext cx="4381500" cy="200025"/>
-          </a:xfrm>
-          <a:prstGeom prst="rect">
-            <a:avLst/>
-          </a:prstGeom>
-          <a:noFill/>
-        </p:spPr>
-        <p:txBody>
-          <a:bodyPr wrap="square" lIns="0" tIns="0" rIns="0" bIns="0" anchor="t">
-            <a:spAutoFit/>
-          </a:bodyPr>
-          <a:lstStyle/>
-          <a:p>
-            <a:pPr algn="ctr"/>
-            <a:r>
-              <a:rPr sz="1350" b="0" i="0" u="none">
-                <a:solidFill>
-                  <a:srgbClr val="CBD5E1"/>
-                </a:solidFill>
-                <a:latin typeface="Inter"/>
-              </a:rPr>
-              <a:t>FILAS PROCESADAS</a:t>
-            </a:r>
-          </a:p>
-        </p:txBody>
-      </p:sp>
-      <p:sp>
-        <p:nvSpPr>
-          <p:cNvPr id="7" name="TextBox 6"/>
-          <p:cNvSpPr txBox="1"/>
-          <p:nvPr/>
-        </p:nvSpPr>
-        <p:spPr>
-          <a:xfrm>
-            <a:off x="1143000" y="4120604"/>
-            <a:ext cx="4381500" cy="355996"/>
-          </a:xfrm>
-          <a:prstGeom prst="rect">
-            <a:avLst/>
-          </a:prstGeom>
-          <a:noFill/>
-        </p:spPr>
-        <p:txBody>
-          <a:bodyPr wrap="square" lIns="0" tIns="0" rIns="0" bIns="0" anchor="t">
-            <a:spAutoFit/>
-          </a:bodyPr>
-          <a:lstStyle/>
-          <a:p>
-            <a:pPr algn="ctr">
-              <a:lnSpc>
-                <a:spcPts val="1364"/>
-              </a:lnSpc>
-            </a:pPr>
-            <a:r>
-              <a:rPr sz="975" b="0" i="0" u="none">
-                <a:solidFill>
-                  <a:srgbClr val="94A3B8"/>
-                </a:solidFill>
-                <a:latin typeface="Inter"/>
-              </a:rPr>
-              <a:t>Volumen de datos correspondiente a la tabla más pesada: SILVER_SUPERCIAS_RANKING.</a:t>
-            </a:r>
-          </a:p>
-        </p:txBody>
-      </p:sp>
-      <p:sp>
-        <p:nvSpPr>
-          <p:cNvPr id="8" name="TextBox 7"/>
-          <p:cNvSpPr txBox="1"/>
-          <p:nvPr/>
-        </p:nvSpPr>
-        <p:spPr>
-          <a:xfrm>
-            <a:off x="6286500" y="2348061"/>
-            <a:ext cx="5400675" cy="276225"/>
-          </a:xfrm>
-          <a:prstGeom prst="rect">
-            <a:avLst/>
-          </a:prstGeom>
-          <a:noFill/>
-        </p:spPr>
-        <p:txBody>
-          <a:bodyPr wrap="square" lIns="228600" tIns="0" rIns="0" bIns="0" anchor="t">
-            <a:spAutoFit/>
-          </a:bodyPr>
-          <a:lstStyle/>
-          <a:p>
-            <a:pPr algn="l"/>
-            <a:r>
-              <a:rPr sz="1404" b="1" i="0" u="none">
-                <a:solidFill>
-                  <a:srgbClr val="0F172A"/>
-                </a:solidFill>
-                <a:latin typeface="Poppins"/>
-              </a:rPr>
-              <a:t>Carga por Lotes Optimizada</a:t>
-            </a:r>
-          </a:p>
-        </p:txBody>
-      </p:sp>
-      <p:sp>
-        <p:nvSpPr>
-          <p:cNvPr id="9" name="TextBox 8"/>
-          <p:cNvSpPr txBox="1"/>
-          <p:nvPr/>
-        </p:nvSpPr>
-        <p:spPr>
-          <a:xfrm>
-            <a:off x="6286500" y="2776686"/>
-            <a:ext cx="5143500" cy="731341"/>
-          </a:xfrm>
-          <a:prstGeom prst="rect">
-            <a:avLst/>
-          </a:prstGeom>
-          <a:noFill/>
-        </p:spPr>
-        <p:txBody>
-          <a:bodyPr wrap="square" lIns="0" tIns="0" rIns="0" bIns="0" anchor="t">
-            <a:spAutoFit/>
-          </a:bodyPr>
-          <a:lstStyle/>
-          <a:p>
-            <a:pPr algn="l">
-              <a:lnSpc>
-                <a:spcPts val="1920"/>
-              </a:lnSpc>
-            </a:pPr>
-            <a:r>
-              <a:rPr sz="1200" b="0" i="0" u="none">
-                <a:solidFill>
-                  <a:srgbClr val="475569"/>
-                </a:solidFill>
-                <a:latin typeface="Inter"/>
-              </a:rPr>
-              <a:t>Para evitar demoras excesivas, el cargador de load.py utiliza inserciones masivas parametrizadas con la interfaz eficiente executemany() de Python-oracledb.</a:t>
-            </a:r>
-          </a:p>
-        </p:txBody>
-      </p:sp>
       <p:pic>
         <p:nvPicPr>
-          <p:cNvPr id="10" name="Picture 9" descr="image.png"/>
+          <p:cNvPr id="9" name="Picture 8" descr="image.png"/>
           <p:cNvPicPr>
             <a:picLocks noChangeAspect="1"/>
           </p:cNvPicPr>
@@ -3636,8 +3734,8 @@
         </p:blipFill>
         <p:spPr>
           <a:xfrm>
-            <a:off x="6286500" y="2395686"/>
-            <a:ext cx="152400" cy="178296"/>
+            <a:off x="762000" y="3853755"/>
+            <a:ext cx="180975" cy="178296"/>
           </a:xfrm>
           <a:prstGeom prst="rect">
             <a:avLst/>
@@ -3647,189 +3745,6 @@
       <p:sp>
         <p:nvSpPr>
           <p:cNvPr id="11" name="TextBox 10"/>
-          <p:cNvSpPr txBox="1"/>
-          <p:nvPr/>
-        </p:nvSpPr>
-        <p:spPr>
-          <a:xfrm>
-            <a:off x="6486525" y="3860452"/>
-            <a:ext cx="4743450" cy="228600"/>
-          </a:xfrm>
-          <a:prstGeom prst="rect">
-            <a:avLst/>
-          </a:prstGeom>
-          <a:noFill/>
-        </p:spPr>
-        <p:txBody>
-          <a:bodyPr wrap="square" lIns="0" tIns="0" rIns="0" bIns="0" anchor="t">
-            <a:spAutoFit/>
-          </a:bodyPr>
-          <a:lstStyle/>
-          <a:p>
-            <a:pPr algn="l">
-              <a:lnSpc>
-                <a:spcPts val="1800"/>
-              </a:lnSpc>
-            </a:pPr>
-            <a:r>
-              <a:rPr sz="1125" b="0" i="0" u="none">
-                <a:solidFill>
-                  <a:srgbClr val="0F172A"/>
-                </a:solidFill>
-                <a:latin typeface="Inter SemiBold"/>
-              </a:rPr>
-              <a:t>Ajuste de Lotes Inteligente:</a:t>
-            </a:r>
-          </a:p>
-        </p:txBody>
-      </p:sp>
-      <p:sp>
-        <p:nvSpPr>
-          <p:cNvPr id="12" name="TextBox 11"/>
-          <p:cNvSpPr txBox="1"/>
-          <p:nvPr/>
-        </p:nvSpPr>
-        <p:spPr>
-          <a:xfrm>
-            <a:off x="6486525" y="4165252"/>
-            <a:ext cx="4743450" cy="243780"/>
-          </a:xfrm>
-          <a:prstGeom prst="rect">
-            <a:avLst/>
-          </a:prstGeom>
-          <a:noFill/>
-        </p:spPr>
-        <p:txBody>
-          <a:bodyPr wrap="square" lIns="209550" tIns="0" rIns="0" bIns="0" anchor="t">
-            <a:spAutoFit/>
-          </a:bodyPr>
-          <a:lstStyle/>
-          <a:p>
-            <a:pPr algn="l">
-              <a:lnSpc>
-                <a:spcPts val="1920"/>
-              </a:lnSpc>
-            </a:pPr>
-            <a:r>
-              <a:rPr sz="1200" b="0" i="0" u="none">
-                <a:solidFill>
-                  <a:srgbClr val="0F172A"/>
-                </a:solidFill>
-                <a:latin typeface="Inter SemiBold"/>
-              </a:rPr>
-              <a:t>Batch Size Base:</a:t>
-            </a:r>
-            <a:r>
-              <a:rPr sz="1200" b="0" i="0" u="none">
-                <a:solidFill>
-                  <a:srgbClr val="475569"/>
-                </a:solidFill>
-                <a:latin typeface="Inter"/>
-              </a:rPr>
-              <a:t> Configurado en 5,000 registros por lote.</a:t>
-            </a:r>
-          </a:p>
-        </p:txBody>
-      </p:sp>
-      <p:sp>
-        <p:nvSpPr>
-          <p:cNvPr id="13" name="TextBox 12"/>
-          <p:cNvSpPr txBox="1"/>
-          <p:nvPr/>
-        </p:nvSpPr>
-        <p:spPr>
-          <a:xfrm>
-            <a:off x="6486525" y="4485233"/>
-            <a:ext cx="4743450" cy="487560"/>
-          </a:xfrm>
-          <a:prstGeom prst="rect">
-            <a:avLst/>
-          </a:prstGeom>
-          <a:noFill/>
-        </p:spPr>
-        <p:txBody>
-          <a:bodyPr wrap="square" lIns="209550" tIns="0" rIns="0" bIns="0" anchor="t">
-            <a:spAutoFit/>
-          </a:bodyPr>
-          <a:lstStyle/>
-          <a:p>
-            <a:pPr algn="l">
-              <a:lnSpc>
-                <a:spcPts val="1920"/>
-              </a:lnSpc>
-            </a:pPr>
-            <a:r>
-              <a:rPr sz="1200" b="0" i="0" u="none">
-                <a:solidFill>
-                  <a:srgbClr val="0F172A"/>
-                </a:solidFill>
-                <a:latin typeface="Inter SemiBold"/>
-              </a:rPr>
-              <a:t>Recomendación Pro:</a:t>
-            </a:r>
-            <a:r>
-              <a:rPr sz="1200" b="0" i="0" u="none">
-                <a:solidFill>
-                  <a:srgbClr val="475569"/>
-                </a:solidFill>
-                <a:latin typeface="Inter"/>
-              </a:rPr>
-              <a:t> Incrementar a 10,000 o 20,000 para optimizar la latencia de red.</a:t>
-            </a:r>
-          </a:p>
-        </p:txBody>
-      </p:sp>
-      <p:pic>
-        <p:nvPicPr>
-          <p:cNvPr id="14" name="Picture 13" descr="image.png"/>
-          <p:cNvPicPr>
-            <a:picLocks noChangeAspect="1"/>
-          </p:cNvPicPr>
-          <p:nvPr/>
-        </p:nvPicPr>
-        <p:blipFill>
-          <a:blip r:embed="rId6"/>
-          <a:stretch>
-            <a:fillRect/>
-          </a:stretch>
-        </p:blipFill>
-        <p:spPr>
-          <a:xfrm>
-            <a:off x="6486525" y="4203352"/>
-            <a:ext cx="133350" cy="152400"/>
-          </a:xfrm>
-          <a:prstGeom prst="rect">
-            <a:avLst/>
-          </a:prstGeom>
-        </p:spPr>
-      </p:pic>
-      <p:pic>
-        <p:nvPicPr>
-          <p:cNvPr id="15" name="Picture 14" descr="image.png"/>
-          <p:cNvPicPr>
-            <a:picLocks noChangeAspect="1"/>
-          </p:cNvPicPr>
-          <p:nvPr/>
-        </p:nvPicPr>
-        <p:blipFill>
-          <a:blip r:embed="rId6"/>
-          <a:stretch>
-            <a:fillRect/>
-          </a:stretch>
-        </p:blipFill>
-        <p:spPr>
-          <a:xfrm>
-            <a:off x="6486525" y="4523333"/>
-            <a:ext cx="133350" cy="152400"/>
-          </a:xfrm>
-          <a:prstGeom prst="rect">
-            <a:avLst/>
-          </a:prstGeom>
-        </p:spPr>
-      </p:pic>
-      <p:sp>
-        <p:nvSpPr>
-          <p:cNvPr id="16" name="TextBox 15"/>
           <p:cNvSpPr txBox="1"/>
           <p:nvPr/>
         </p:nvSpPr>
@@ -3861,14 +3776,14 @@
                 </a:solidFill>
                 <a:latin typeface="Poppins"/>
               </a:rPr>
-              <a:t>Estrategia de Carga Masiva (High Performance)</a:t>
-            </a:r>
-          </a:p>
-        </p:txBody>
-      </p:sp>
-      <p:sp>
-        <p:nvSpPr>
-          <p:cNvPr id="17" name="Rectangle 16"/>
+              <a:t>Bug de Codificación Detectado &amp; Solucionado</a:t>
+            </a:r>
+          </a:p>
+        </p:txBody>
+      </p:sp>
+      <p:sp>
+        <p:nvSpPr>
+          <p:cNvPr id="12" name="Rectangle 11"/>
           <p:cNvSpPr/>
           <p:nvPr/>
         </p:nvSpPr>
@@ -3911,6 +3826,41 @@
           </a:p>
         </p:txBody>
       </p:sp>
+      <p:sp>
+        <p:nvSpPr>
+          <p:cNvPr id="14" name="CuadroTexto 13">
+            <a:extLst>
+              <a:ext uri="{FF2B5EF4-FFF2-40B4-BE49-F238E27FC236}">
+                <a16:creationId xmlns:a16="http://schemas.microsoft.com/office/drawing/2014/main" id="{B41CA86B-CA56-A1F2-BE9E-1901BE020680}"/>
+              </a:ext>
+            </a:extLst>
+          </p:cNvPr>
+          <p:cNvSpPr txBox="1"/>
+          <p:nvPr/>
+        </p:nvSpPr>
+        <p:spPr>
+          <a:xfrm>
+            <a:off x="8280400" y="3068925"/>
+            <a:ext cx="1676400" cy="1569660"/>
+          </a:xfrm>
+          <a:prstGeom prst="rect">
+            <a:avLst/>
+          </a:prstGeom>
+          <a:noFill/>
+        </p:spPr>
+        <p:txBody>
+          <a:bodyPr wrap="square">
+            <a:spAutoFit/>
+          </a:bodyPr>
+          <a:lstStyle/>
+          <a:p>
+            <a:r>
+              <a:rPr lang="en-US" sz="9600" dirty="0"/>
+              <a:t>�</a:t>
+            </a:r>
+          </a:p>
+        </p:txBody>
+      </p:sp>
     </p:spTree>
   </p:cSld>
   <p:clrMapOvr>
@@ -3920,6 +3870,649 @@
 </file>
 
 <file path=ppt/slides/slide11.xml><?xml version="1.0" encoding="utf-8"?>
+<p:sld xmlns:a="http://schemas.openxmlformats.org/drawingml/2006/main" xmlns:r="http://schemas.openxmlformats.org/officeDocument/2006/relationships" xmlns:p="http://schemas.openxmlformats.org/presentationml/2006/main">
+  <p:cSld>
+    <p:spTree>
+      <p:nvGrpSpPr>
+        <p:cNvPr id="1" name=""/>
+        <p:cNvGrpSpPr/>
+        <p:nvPr/>
+      </p:nvGrpSpPr>
+      <p:grpSpPr>
+        <a:xfrm>
+          <a:off x="0" y="0"/>
+          <a:ext cx="0" cy="0"/>
+          <a:chOff x="0" y="0"/>
+          <a:chExt cx="0" cy="0"/>
+        </a:xfrm>
+      </p:grpSpPr>
+      <p:pic>
+        <p:nvPicPr>
+          <p:cNvPr id="3" name="Imagen 2">
+            <a:extLst>
+              <a:ext uri="{FF2B5EF4-FFF2-40B4-BE49-F238E27FC236}">
+                <a16:creationId xmlns:a16="http://schemas.microsoft.com/office/drawing/2014/main" id="{09319A1D-518B-5B96-D0FB-5E1721BCAF4F}"/>
+              </a:ext>
+            </a:extLst>
+          </p:cNvPr>
+          <p:cNvPicPr>
+            <a:picLocks noChangeAspect="1"/>
+          </p:cNvPicPr>
+          <p:nvPr/>
+        </p:nvPicPr>
+        <p:blipFill>
+          <a:blip r:embed="rId2"/>
+          <a:stretch>
+            <a:fillRect/>
+          </a:stretch>
+        </p:blipFill>
+        <p:spPr>
+          <a:xfrm>
+            <a:off x="506245" y="2055262"/>
+            <a:ext cx="11179509" cy="2552921"/>
+          </a:xfrm>
+          <a:prstGeom prst="rect">
+            <a:avLst/>
+          </a:prstGeom>
+        </p:spPr>
+      </p:pic>
+    </p:spTree>
+    <p:extLst>
+      <p:ext uri="{BB962C8B-B14F-4D97-AF65-F5344CB8AC3E}">
+        <p14:creationId xmlns:p14="http://schemas.microsoft.com/office/powerpoint/2010/main" val="227659931"/>
+      </p:ext>
+    </p:extLst>
+  </p:cSld>
+  <p:clrMapOvr>
+    <a:masterClrMapping/>
+  </p:clrMapOvr>
+</p:sld>
+</file>
+
+<file path=ppt/slides/slide12.xml><?xml version="1.0" encoding="utf-8"?>
+<p:sld xmlns:a="http://schemas.openxmlformats.org/drawingml/2006/main" xmlns:r="http://schemas.openxmlformats.org/officeDocument/2006/relationships" xmlns:p="http://schemas.openxmlformats.org/presentationml/2006/main">
+  <p:cSld>
+    <p:bg>
+      <p:bgPr>
+        <a:solidFill>
+          <a:srgbClr val="F8FAFC"/>
+        </a:solidFill>
+        <a:effectLst/>
+      </p:bgPr>
+    </p:bg>
+    <p:spTree>
+      <p:nvGrpSpPr>
+        <p:cNvPr id="1" name=""/>
+        <p:cNvGrpSpPr/>
+        <p:nvPr/>
+      </p:nvGrpSpPr>
+      <p:grpSpPr>
+        <a:xfrm>
+          <a:off x="0" y="0"/>
+          <a:ext cx="0" cy="0"/>
+          <a:chOff x="0" y="0"/>
+          <a:chExt cx="0" cy="0"/>
+        </a:xfrm>
+      </p:grpSpPr>
+      <p:pic>
+        <p:nvPicPr>
+          <p:cNvPr id="2" name="Picture 1" descr="image.png"/>
+          <p:cNvPicPr>
+            <a:picLocks noChangeAspect="1"/>
+          </p:cNvPicPr>
+          <p:nvPr/>
+        </p:nvPicPr>
+        <p:blipFill>
+          <a:blip r:embed="rId2"/>
+          <a:stretch>
+            <a:fillRect/>
+          </a:stretch>
+        </p:blipFill>
+        <p:spPr>
+          <a:xfrm>
+            <a:off x="0" y="0"/>
+            <a:ext cx="12192000" cy="6858000"/>
+          </a:xfrm>
+          <a:prstGeom prst="rect">
+            <a:avLst/>
+          </a:prstGeom>
+        </p:spPr>
+      </p:pic>
+      <p:pic>
+        <p:nvPicPr>
+          <p:cNvPr id="3" name="Picture 2" descr="image.png"/>
+          <p:cNvPicPr>
+            <a:picLocks noChangeAspect="1"/>
+          </p:cNvPicPr>
+          <p:nvPr/>
+        </p:nvPicPr>
+        <p:blipFill>
+          <a:blip r:embed="rId3"/>
+          <a:stretch>
+            <a:fillRect/>
+          </a:stretch>
+        </p:blipFill>
+        <p:spPr>
+          <a:xfrm>
+            <a:off x="762000" y="2663279"/>
+            <a:ext cx="5143500" cy="2194321"/>
+          </a:xfrm>
+          <a:prstGeom prst="rect">
+            <a:avLst/>
+          </a:prstGeom>
+        </p:spPr>
+      </p:pic>
+      <p:pic>
+        <p:nvPicPr>
+          <p:cNvPr id="4" name="Picture 3" descr="image.png"/>
+          <p:cNvPicPr>
+            <a:picLocks noChangeAspect="1"/>
+          </p:cNvPicPr>
+          <p:nvPr/>
+        </p:nvPicPr>
+        <p:blipFill>
+          <a:blip r:embed="rId4"/>
+          <a:stretch>
+            <a:fillRect/>
+          </a:stretch>
+        </p:blipFill>
+        <p:spPr>
+          <a:xfrm>
+            <a:off x="6286500" y="3660427"/>
+            <a:ext cx="5143500" cy="1512391"/>
+          </a:xfrm>
+          <a:prstGeom prst="rect">
+            <a:avLst/>
+          </a:prstGeom>
+        </p:spPr>
+      </p:pic>
+      <p:sp>
+        <p:nvSpPr>
+          <p:cNvPr id="5" name="TextBox 4"/>
+          <p:cNvSpPr txBox="1"/>
+          <p:nvPr/>
+        </p:nvSpPr>
+        <p:spPr>
+          <a:xfrm>
+            <a:off x="1143000" y="3044279"/>
+            <a:ext cx="4381500" cy="685800"/>
+          </a:xfrm>
+          <a:prstGeom prst="rect">
+            <a:avLst/>
+          </a:prstGeom>
+          <a:noFill/>
+        </p:spPr>
+        <p:txBody>
+          <a:bodyPr wrap="square" lIns="0" tIns="0" rIns="0" bIns="0" anchor="t">
+            <a:spAutoFit/>
+          </a:bodyPr>
+          <a:lstStyle/>
+          <a:p>
+            <a:pPr algn="ctr">
+              <a:lnSpc>
+                <a:spcPts val="5400"/>
+              </a:lnSpc>
+            </a:pPr>
+            <a:r>
+              <a:rPr sz="5400" b="1" i="0" u="none">
+                <a:solidFill>
+                  <a:srgbClr val="14B8A6"/>
+                </a:solidFill>
+                <a:latin typeface="Poppins"/>
+              </a:rPr>
+              <a:t>1.67M</a:t>
+            </a:r>
+          </a:p>
+        </p:txBody>
+      </p:sp>
+      <p:sp>
+        <p:nvSpPr>
+          <p:cNvPr id="6" name="TextBox 5"/>
+          <p:cNvSpPr txBox="1"/>
+          <p:nvPr/>
+        </p:nvSpPr>
+        <p:spPr>
+          <a:xfrm>
+            <a:off x="1143000" y="3806279"/>
+            <a:ext cx="4381500" cy="200025"/>
+          </a:xfrm>
+          <a:prstGeom prst="rect">
+            <a:avLst/>
+          </a:prstGeom>
+          <a:noFill/>
+        </p:spPr>
+        <p:txBody>
+          <a:bodyPr wrap="square" lIns="0" tIns="0" rIns="0" bIns="0" anchor="t">
+            <a:spAutoFit/>
+          </a:bodyPr>
+          <a:lstStyle/>
+          <a:p>
+            <a:pPr algn="ctr"/>
+            <a:r>
+              <a:rPr sz="1350" b="0" i="0" u="none">
+                <a:solidFill>
+                  <a:srgbClr val="CBD5E1"/>
+                </a:solidFill>
+                <a:latin typeface="Inter"/>
+              </a:rPr>
+              <a:t>FILAS PROCESADAS</a:t>
+            </a:r>
+          </a:p>
+        </p:txBody>
+      </p:sp>
+      <p:sp>
+        <p:nvSpPr>
+          <p:cNvPr id="7" name="TextBox 6"/>
+          <p:cNvSpPr txBox="1"/>
+          <p:nvPr/>
+        </p:nvSpPr>
+        <p:spPr>
+          <a:xfrm>
+            <a:off x="1143000" y="4120604"/>
+            <a:ext cx="4381500" cy="355996"/>
+          </a:xfrm>
+          <a:prstGeom prst="rect">
+            <a:avLst/>
+          </a:prstGeom>
+          <a:noFill/>
+        </p:spPr>
+        <p:txBody>
+          <a:bodyPr wrap="square" lIns="0" tIns="0" rIns="0" bIns="0" anchor="t">
+            <a:spAutoFit/>
+          </a:bodyPr>
+          <a:lstStyle/>
+          <a:p>
+            <a:pPr algn="ctr">
+              <a:lnSpc>
+                <a:spcPts val="1364"/>
+              </a:lnSpc>
+            </a:pPr>
+            <a:r>
+              <a:rPr sz="975" b="0" i="0" u="none">
+                <a:solidFill>
+                  <a:srgbClr val="94A3B8"/>
+                </a:solidFill>
+                <a:latin typeface="Inter"/>
+              </a:rPr>
+              <a:t>Volumen de datos correspondiente a la tabla más pesada: SILVER_SUPERCIAS_RANKING.</a:t>
+            </a:r>
+          </a:p>
+        </p:txBody>
+      </p:sp>
+      <p:sp>
+        <p:nvSpPr>
+          <p:cNvPr id="8" name="TextBox 7"/>
+          <p:cNvSpPr txBox="1"/>
+          <p:nvPr/>
+        </p:nvSpPr>
+        <p:spPr>
+          <a:xfrm>
+            <a:off x="6286500" y="2348061"/>
+            <a:ext cx="5400675" cy="276225"/>
+          </a:xfrm>
+          <a:prstGeom prst="rect">
+            <a:avLst/>
+          </a:prstGeom>
+          <a:noFill/>
+        </p:spPr>
+        <p:txBody>
+          <a:bodyPr wrap="square" lIns="228600" tIns="0" rIns="0" bIns="0" anchor="t">
+            <a:spAutoFit/>
+          </a:bodyPr>
+          <a:lstStyle/>
+          <a:p>
+            <a:pPr algn="l"/>
+            <a:r>
+              <a:rPr sz="1404" b="1" i="0" u="none">
+                <a:solidFill>
+                  <a:srgbClr val="0F172A"/>
+                </a:solidFill>
+                <a:latin typeface="Poppins"/>
+              </a:rPr>
+              <a:t>Carga por Lotes Optimizada</a:t>
+            </a:r>
+          </a:p>
+        </p:txBody>
+      </p:sp>
+      <p:sp>
+        <p:nvSpPr>
+          <p:cNvPr id="9" name="TextBox 8"/>
+          <p:cNvSpPr txBox="1"/>
+          <p:nvPr/>
+        </p:nvSpPr>
+        <p:spPr>
+          <a:xfrm>
+            <a:off x="6286500" y="2776686"/>
+            <a:ext cx="5143500" cy="731341"/>
+          </a:xfrm>
+          <a:prstGeom prst="rect">
+            <a:avLst/>
+          </a:prstGeom>
+          <a:noFill/>
+        </p:spPr>
+        <p:txBody>
+          <a:bodyPr wrap="square" lIns="0" tIns="0" rIns="0" bIns="0" anchor="t">
+            <a:spAutoFit/>
+          </a:bodyPr>
+          <a:lstStyle/>
+          <a:p>
+            <a:pPr algn="l">
+              <a:lnSpc>
+                <a:spcPts val="1920"/>
+              </a:lnSpc>
+            </a:pPr>
+            <a:r>
+              <a:rPr sz="1200" b="0" i="0" u="none">
+                <a:solidFill>
+                  <a:srgbClr val="475569"/>
+                </a:solidFill>
+                <a:latin typeface="Inter"/>
+              </a:rPr>
+              <a:t>Para evitar demoras excesivas, el cargador de load.py utiliza inserciones masivas parametrizadas con la interfaz eficiente executemany() de Python-oracledb.</a:t>
+            </a:r>
+          </a:p>
+        </p:txBody>
+      </p:sp>
+      <p:pic>
+        <p:nvPicPr>
+          <p:cNvPr id="10" name="Picture 9" descr="image.png"/>
+          <p:cNvPicPr>
+            <a:picLocks noChangeAspect="1"/>
+          </p:cNvPicPr>
+          <p:nvPr/>
+        </p:nvPicPr>
+        <p:blipFill>
+          <a:blip r:embed="rId5"/>
+          <a:stretch>
+            <a:fillRect/>
+          </a:stretch>
+        </p:blipFill>
+        <p:spPr>
+          <a:xfrm>
+            <a:off x="6286500" y="2395686"/>
+            <a:ext cx="152400" cy="178296"/>
+          </a:xfrm>
+          <a:prstGeom prst="rect">
+            <a:avLst/>
+          </a:prstGeom>
+        </p:spPr>
+      </p:pic>
+      <p:sp>
+        <p:nvSpPr>
+          <p:cNvPr id="11" name="TextBox 10"/>
+          <p:cNvSpPr txBox="1"/>
+          <p:nvPr/>
+        </p:nvSpPr>
+        <p:spPr>
+          <a:xfrm>
+            <a:off x="6486525" y="3860452"/>
+            <a:ext cx="4743450" cy="228600"/>
+          </a:xfrm>
+          <a:prstGeom prst="rect">
+            <a:avLst/>
+          </a:prstGeom>
+          <a:noFill/>
+        </p:spPr>
+        <p:txBody>
+          <a:bodyPr wrap="square" lIns="0" tIns="0" rIns="0" bIns="0" anchor="t">
+            <a:spAutoFit/>
+          </a:bodyPr>
+          <a:lstStyle/>
+          <a:p>
+            <a:pPr algn="l">
+              <a:lnSpc>
+                <a:spcPts val="1800"/>
+              </a:lnSpc>
+            </a:pPr>
+            <a:r>
+              <a:rPr sz="1125" b="0" i="0" u="none">
+                <a:solidFill>
+                  <a:srgbClr val="0F172A"/>
+                </a:solidFill>
+                <a:latin typeface="Inter SemiBold"/>
+              </a:rPr>
+              <a:t>Ajuste de Lotes Inteligente:</a:t>
+            </a:r>
+          </a:p>
+        </p:txBody>
+      </p:sp>
+      <p:sp>
+        <p:nvSpPr>
+          <p:cNvPr id="12" name="TextBox 11"/>
+          <p:cNvSpPr txBox="1"/>
+          <p:nvPr/>
+        </p:nvSpPr>
+        <p:spPr>
+          <a:xfrm>
+            <a:off x="6486525" y="4165252"/>
+            <a:ext cx="4743450" cy="243780"/>
+          </a:xfrm>
+          <a:prstGeom prst="rect">
+            <a:avLst/>
+          </a:prstGeom>
+          <a:noFill/>
+        </p:spPr>
+        <p:txBody>
+          <a:bodyPr wrap="square" lIns="209550" tIns="0" rIns="0" bIns="0" anchor="t">
+            <a:spAutoFit/>
+          </a:bodyPr>
+          <a:lstStyle/>
+          <a:p>
+            <a:pPr algn="l">
+              <a:lnSpc>
+                <a:spcPts val="1920"/>
+              </a:lnSpc>
+            </a:pPr>
+            <a:r>
+              <a:rPr sz="1200" b="0" i="0" u="none">
+                <a:solidFill>
+                  <a:srgbClr val="0F172A"/>
+                </a:solidFill>
+                <a:latin typeface="Inter SemiBold"/>
+              </a:rPr>
+              <a:t>Batch Size Base:</a:t>
+            </a:r>
+            <a:r>
+              <a:rPr sz="1200" b="0" i="0" u="none">
+                <a:solidFill>
+                  <a:srgbClr val="475569"/>
+                </a:solidFill>
+                <a:latin typeface="Inter"/>
+              </a:rPr>
+              <a:t> Configurado en 5,000 registros por lote.</a:t>
+            </a:r>
+          </a:p>
+        </p:txBody>
+      </p:sp>
+      <p:sp>
+        <p:nvSpPr>
+          <p:cNvPr id="13" name="TextBox 12"/>
+          <p:cNvSpPr txBox="1"/>
+          <p:nvPr/>
+        </p:nvSpPr>
+        <p:spPr>
+          <a:xfrm>
+            <a:off x="6486525" y="4485233"/>
+            <a:ext cx="4743450" cy="487560"/>
+          </a:xfrm>
+          <a:prstGeom prst="rect">
+            <a:avLst/>
+          </a:prstGeom>
+          <a:noFill/>
+        </p:spPr>
+        <p:txBody>
+          <a:bodyPr wrap="square" lIns="209550" tIns="0" rIns="0" bIns="0" anchor="t">
+            <a:spAutoFit/>
+          </a:bodyPr>
+          <a:lstStyle/>
+          <a:p>
+            <a:pPr algn="l">
+              <a:lnSpc>
+                <a:spcPts val="1920"/>
+              </a:lnSpc>
+            </a:pPr>
+            <a:r>
+              <a:rPr sz="1200" b="0" i="0" u="none">
+                <a:solidFill>
+                  <a:srgbClr val="0F172A"/>
+                </a:solidFill>
+                <a:latin typeface="Inter SemiBold"/>
+              </a:rPr>
+              <a:t>Recomendación Pro:</a:t>
+            </a:r>
+            <a:r>
+              <a:rPr sz="1200" b="0" i="0" u="none">
+                <a:solidFill>
+                  <a:srgbClr val="475569"/>
+                </a:solidFill>
+                <a:latin typeface="Inter"/>
+              </a:rPr>
+              <a:t> Incrementar a 10,000 o 20,000 para optimizar la latencia de red.</a:t>
+            </a:r>
+          </a:p>
+        </p:txBody>
+      </p:sp>
+      <p:pic>
+        <p:nvPicPr>
+          <p:cNvPr id="14" name="Picture 13" descr="image.png"/>
+          <p:cNvPicPr>
+            <a:picLocks noChangeAspect="1"/>
+          </p:cNvPicPr>
+          <p:nvPr/>
+        </p:nvPicPr>
+        <p:blipFill>
+          <a:blip r:embed="rId6"/>
+          <a:stretch>
+            <a:fillRect/>
+          </a:stretch>
+        </p:blipFill>
+        <p:spPr>
+          <a:xfrm>
+            <a:off x="6486525" y="4203352"/>
+            <a:ext cx="133350" cy="152400"/>
+          </a:xfrm>
+          <a:prstGeom prst="rect">
+            <a:avLst/>
+          </a:prstGeom>
+        </p:spPr>
+      </p:pic>
+      <p:pic>
+        <p:nvPicPr>
+          <p:cNvPr id="15" name="Picture 14" descr="image.png"/>
+          <p:cNvPicPr>
+            <a:picLocks noChangeAspect="1"/>
+          </p:cNvPicPr>
+          <p:nvPr/>
+        </p:nvPicPr>
+        <p:blipFill>
+          <a:blip r:embed="rId6"/>
+          <a:stretch>
+            <a:fillRect/>
+          </a:stretch>
+        </p:blipFill>
+        <p:spPr>
+          <a:xfrm>
+            <a:off x="6486525" y="4523333"/>
+            <a:ext cx="133350" cy="152400"/>
+          </a:xfrm>
+          <a:prstGeom prst="rect">
+            <a:avLst/>
+          </a:prstGeom>
+        </p:spPr>
+      </p:pic>
+      <p:sp>
+        <p:nvSpPr>
+          <p:cNvPr id="16" name="TextBox 15"/>
+          <p:cNvSpPr txBox="1"/>
+          <p:nvPr/>
+        </p:nvSpPr>
+        <p:spPr>
+          <a:xfrm>
+            <a:off x="914400" y="571500"/>
+            <a:ext cx="11041380" cy="434280"/>
+          </a:xfrm>
+          <a:prstGeom prst="rect">
+            <a:avLst/>
+          </a:prstGeom>
+          <a:noFill/>
+        </p:spPr>
+        <p:txBody>
+          <a:bodyPr wrap="square" lIns="0" tIns="0" rIns="0" bIns="0" anchor="ctr">
+            <a:spAutoFit/>
+          </a:bodyPr>
+          <a:lstStyle/>
+          <a:p>
+            <a:pPr algn="l">
+              <a:lnSpc>
+                <a:spcPts val="3420"/>
+              </a:lnSpc>
+            </a:pPr>
+            <a:r>
+              <a:rPr sz="2850" b="1" i="0" u="none">
+                <a:solidFill>
+                  <a:srgbClr val="0F172A"/>
+                </a:solidFill>
+                <a:latin typeface="Poppins"/>
+              </a:rPr>
+              <a:t>Estrategia de Carga Masiva (High Performance)</a:t>
+            </a:r>
+          </a:p>
+        </p:txBody>
+      </p:sp>
+      <p:sp>
+        <p:nvSpPr>
+          <p:cNvPr id="17" name="Rectangle 16"/>
+          <p:cNvSpPr/>
+          <p:nvPr/>
+        </p:nvSpPr>
+        <p:spPr>
+          <a:xfrm>
+            <a:off x="762000" y="571500"/>
+            <a:ext cx="57150" cy="434280"/>
+          </a:xfrm>
+          <a:prstGeom prst="rect">
+            <a:avLst/>
+          </a:prstGeom>
+          <a:solidFill>
+            <a:srgbClr val="0D9488"/>
+          </a:solidFill>
+          <a:ln>
+            <a:noFill/>
+          </a:ln>
+          <a:effectLst/>
+        </p:spPr>
+        <p:style>
+          <a:lnRef idx="1">
+            <a:schemeClr val="accent1"/>
+          </a:lnRef>
+          <a:fillRef idx="3">
+            <a:schemeClr val="accent1"/>
+          </a:fillRef>
+          <a:effectRef idx="2">
+            <a:schemeClr val="accent1"/>
+          </a:effectRef>
+          <a:fontRef idx="minor">
+            <a:schemeClr val="lt1"/>
+          </a:fontRef>
+        </p:style>
+        <p:txBody>
+          <a:bodyPr rtlCol="0" anchor="ctr"/>
+          <a:lstStyle/>
+          <a:p>
+            <a:pPr algn="ctr"/>
+            <a:endParaRPr/>
+          </a:p>
+        </p:txBody>
+      </p:sp>
+    </p:spTree>
+  </p:cSld>
+  <p:clrMapOvr>
+    <a:masterClrMapping/>
+  </p:clrMapOvr>
+</p:sld>
+</file>
+
+<file path=ppt/slides/slide13.xml><?xml version="1.0" encoding="utf-8"?>
 <p:sld xmlns:a="http://schemas.openxmlformats.org/drawingml/2006/main" xmlns:r="http://schemas.openxmlformats.org/officeDocument/2006/relationships" xmlns:p="http://schemas.openxmlformats.org/presentationml/2006/main">
   <p:cSld>
     <p:bg>
@@ -5550,16 +6143,169 @@
           </a:prstGeom>
         </p:spPr>
       </p:pic>
-      <p:sp>
-        <p:nvSpPr>
-          <p:cNvPr id="3" name="TextBox 2"/>
+      <p:pic>
+        <p:nvPicPr>
+          <p:cNvPr id="3" name="Picture 2" descr="image.png"/>
+          <p:cNvPicPr>
+            <a:picLocks noChangeAspect="1"/>
+          </p:cNvPicPr>
+          <p:nvPr/>
+        </p:nvPicPr>
+        <p:blipFill>
+          <a:blip r:embed="rId3"/>
+          <a:stretch>
+            <a:fillRect/>
+          </a:stretch>
+        </p:blipFill>
+        <p:spPr>
+          <a:xfrm>
+            <a:off x="762000" y="4797623"/>
+            <a:ext cx="10668000" cy="518070"/>
+          </a:xfrm>
+          <a:prstGeom prst="rect">
+            <a:avLst/>
+          </a:prstGeom>
+        </p:spPr>
+      </p:pic>
+      <p:pic>
+        <p:nvPicPr>
+          <p:cNvPr id="4" name="Picture 3" descr="image.png"/>
+          <p:cNvPicPr>
+            <a:picLocks noChangeAspect="1"/>
+          </p:cNvPicPr>
+          <p:nvPr/>
+        </p:nvPicPr>
+        <p:blipFill>
+          <a:blip r:embed="rId4"/>
+          <a:stretch>
+            <a:fillRect/>
+          </a:stretch>
+        </p:blipFill>
+        <p:spPr>
+          <a:xfrm>
+            <a:off x="762000" y="2395537"/>
+            <a:ext cx="2667000" cy="1925835"/>
+          </a:xfrm>
+          <a:prstGeom prst="rect">
+            <a:avLst/>
+          </a:prstGeom>
+        </p:spPr>
+      </p:pic>
+      <p:pic>
+        <p:nvPicPr>
+          <p:cNvPr id="5" name="Picture 4" descr="image.png"/>
+          <p:cNvPicPr>
+            <a:picLocks noChangeAspect="1"/>
+          </p:cNvPicPr>
+          <p:nvPr/>
+        </p:nvPicPr>
+        <p:blipFill>
+          <a:blip r:embed="rId5"/>
+          <a:stretch>
+            <a:fillRect/>
+          </a:stretch>
+        </p:blipFill>
+        <p:spPr>
+          <a:xfrm>
+            <a:off x="4762500" y="2395537"/>
+            <a:ext cx="2667000" cy="1925835"/>
+          </a:xfrm>
+          <a:prstGeom prst="rect">
+            <a:avLst/>
+          </a:prstGeom>
+        </p:spPr>
+      </p:pic>
+      <p:pic>
+        <p:nvPicPr>
+          <p:cNvPr id="6" name="Picture 5" descr="image.png"/>
+          <p:cNvPicPr>
+            <a:picLocks noChangeAspect="1"/>
+          </p:cNvPicPr>
+          <p:nvPr/>
+        </p:nvPicPr>
+        <p:blipFill>
+          <a:blip r:embed="rId4"/>
+          <a:stretch>
+            <a:fillRect/>
+          </a:stretch>
+        </p:blipFill>
+        <p:spPr>
+          <a:xfrm>
+            <a:off x="8763000" y="2395537"/>
+            <a:ext cx="2667000" cy="1925835"/>
+          </a:xfrm>
+          <a:prstGeom prst="rect">
+            <a:avLst/>
+          </a:prstGeom>
+        </p:spPr>
+      </p:pic>
+      <p:sp>
+        <p:nvSpPr>
+          <p:cNvPr id="7" name="TextBox 6"/>
           <p:cNvSpPr txBox="1"/>
           <p:nvPr/>
         </p:nvSpPr>
         <p:spPr>
           <a:xfrm>
-            <a:off x="2095500" y="571500"/>
-            <a:ext cx="8001000" cy="200025"/>
+            <a:off x="914400" y="4950023"/>
+            <a:ext cx="10363200" cy="213270"/>
+          </a:xfrm>
+          <a:prstGeom prst="rect">
+            <a:avLst/>
+          </a:prstGeom>
+          <a:noFill/>
+        </p:spPr>
+        <p:txBody>
+          <a:bodyPr wrap="square" lIns="209550" tIns="0" rIns="0" bIns="0" anchor="t">
+            <a:spAutoFit/>
+          </a:bodyPr>
+          <a:lstStyle/>
+          <a:p>
+            <a:pPr algn="ctr">
+              <a:lnSpc>
+                <a:spcPts val="1679"/>
+              </a:lnSpc>
+            </a:pPr>
+            <a:r>
+              <a:rPr sz="1050" b="0" i="0" u="none">
+                <a:solidFill>
+                  <a:srgbClr val="475569"/>
+                </a:solidFill>
+                <a:latin typeface="Inter"/>
+              </a:rPr>
+              <a:t>Este flujo garantiza el aislamiento de capas de datos cumpliendo con las mejores prácticas de </a:t>
+            </a:r>
+            <a:r>
+              <a:rPr sz="1050" b="0" i="0" u="none">
+                <a:solidFill>
+                  <a:srgbClr val="0F172A"/>
+                </a:solidFill>
+                <a:latin typeface="Inter SemiBold"/>
+              </a:rPr>
+              <a:t>Data Warehousing</a:t>
+            </a:r>
+            <a:r>
+              <a:rPr sz="1050" b="0" i="0" u="none">
+                <a:solidFill>
+                  <a:srgbClr val="475569"/>
+                </a:solidFill>
+                <a:latin typeface="Inter"/>
+              </a:rPr>
+              <a:t>.</a:t>
+            </a:r>
+          </a:p>
+        </p:txBody>
+      </p:sp>
+      <p:sp>
+        <p:nvSpPr>
+          <p:cNvPr id="8" name="TextBox 7"/>
+          <p:cNvSpPr txBox="1"/>
+          <p:nvPr/>
+        </p:nvSpPr>
+        <p:spPr>
+          <a:xfrm>
+            <a:off x="955357" y="2643187"/>
+            <a:ext cx="2280285" cy="200025"/>
           </a:xfrm>
           <a:prstGeom prst="rect">
             <a:avLst/>
@@ -5580,21 +6326,21 @@
                 </a:solidFill>
                 <a:latin typeface="Poppins"/>
               </a:rPr>
-              <a:t>SECCIÓN 01</a:t>
-            </a:r>
-          </a:p>
-        </p:txBody>
-      </p:sp>
-      <p:sp>
-        <p:nvSpPr>
-          <p:cNvPr id="4" name="TextBox 3"/>
+              <a:t>CARGA INICIAL</a:t>
+            </a:r>
+          </a:p>
+        </p:txBody>
+      </p:sp>
+      <p:sp>
+        <p:nvSpPr>
+          <p:cNvPr id="9" name="TextBox 8"/>
           <p:cNvSpPr txBox="1"/>
           <p:nvPr/>
         </p:nvSpPr>
         <p:spPr>
           <a:xfrm>
-            <a:off x="2095500" y="885825"/>
-            <a:ext cx="8001000" cy="742950"/>
+            <a:off x="955357" y="2919412"/>
+            <a:ext cx="2280285" cy="285750"/>
           </a:xfrm>
           <a:prstGeom prst="rect">
             <a:avLst/>
@@ -5609,27 +6355,434 @@
           <a:p>
             <a:pPr algn="ctr"/>
             <a:r>
-              <a:rPr sz="3900" b="1" i="0" u="none">
+              <a:rPr sz="1500" b="1" i="0" u="none">
                 <a:solidFill>
                   <a:srgbClr val="0F172A"/>
                 </a:solidFill>
                 <a:latin typeface="Poppins"/>
               </a:rPr>
-              <a:t>Arquitectura del Pipeline</a:t>
-            </a:r>
-          </a:p>
-        </p:txBody>
-      </p:sp>
-      <p:sp>
-        <p:nvSpPr>
-          <p:cNvPr id="5" name="Rectangle 4"/>
+              <a:t>Bronze Layer</a:t>
+            </a:r>
+          </a:p>
+        </p:txBody>
+      </p:sp>
+      <p:sp>
+        <p:nvSpPr>
+          <p:cNvPr id="10" name="TextBox 9"/>
+          <p:cNvSpPr txBox="1"/>
+          <p:nvPr/>
+        </p:nvSpPr>
+        <p:spPr>
+          <a:xfrm>
+            <a:off x="1009650" y="3281362"/>
+            <a:ext cx="2171700" cy="792360"/>
+          </a:xfrm>
+          <a:prstGeom prst="rect">
+            <a:avLst/>
+          </a:prstGeom>
+          <a:noFill/>
+        </p:spPr>
+        <p:txBody>
+          <a:bodyPr wrap="square" lIns="0" tIns="0" rIns="0" bIns="0" anchor="t">
+            <a:spAutoFit/>
+          </a:bodyPr>
+          <a:lstStyle/>
+          <a:p>
+            <a:pPr algn="ctr">
+              <a:lnSpc>
+                <a:spcPts val="1560"/>
+              </a:lnSpc>
+            </a:pPr>
+            <a:r>
+              <a:rPr sz="975" b="0" i="0" u="none">
+                <a:solidFill>
+                  <a:srgbClr val="0F172A"/>
+                </a:solidFill>
+                <a:latin typeface="Inter SemiBold"/>
+              </a:rPr>
+              <a:t>Oracle (TAB_CONSOLIDADO)</a:t>
+            </a:r>
+            <a:r>
+              <a:t>
+</a:t>
+            </a:r>
+            <a:r>
+              <a:rPr sz="975" b="0" i="0" u="none">
+                <a:solidFill>
+                  <a:srgbClr val="64748B"/>
+                </a:solidFill>
+                <a:latin typeface="Inter"/>
+              </a:rPr>
+              <a:t> Datos crudos cargados por RPA. Almacena 14 indicadores en formato JSON crudo.</a:t>
+            </a:r>
+          </a:p>
+        </p:txBody>
+      </p:sp>
+      <p:pic>
+        <p:nvPicPr>
+          <p:cNvPr id="11" name="Picture 10" descr="image.png"/>
+          <p:cNvPicPr>
+            <a:picLocks noChangeAspect="1"/>
+          </p:cNvPicPr>
+          <p:nvPr/>
+        </p:nvPicPr>
+        <p:blipFill>
+          <a:blip r:embed="rId6"/>
+          <a:stretch>
+            <a:fillRect/>
+          </a:stretch>
+        </p:blipFill>
+        <p:spPr>
+          <a:xfrm>
+            <a:off x="3962400" y="3225105"/>
+            <a:ext cx="266700" cy="266700"/>
+          </a:xfrm>
+          <a:prstGeom prst="rect">
+            <a:avLst/>
+          </a:prstGeom>
+        </p:spPr>
+      </p:pic>
+      <p:sp>
+        <p:nvSpPr>
+          <p:cNvPr id="12" name="TextBox 11"/>
+          <p:cNvSpPr txBox="1"/>
+          <p:nvPr/>
+        </p:nvSpPr>
+        <p:spPr>
+          <a:xfrm>
+            <a:off x="4955857" y="2643187"/>
+            <a:ext cx="2280285" cy="200025"/>
+          </a:xfrm>
+          <a:prstGeom prst="rect">
+            <a:avLst/>
+          </a:prstGeom>
+          <a:noFill/>
+        </p:spPr>
+        <p:txBody>
+          <a:bodyPr wrap="square" lIns="0" tIns="0" rIns="0" bIns="0" anchor="t">
+            <a:spAutoFit/>
+          </a:bodyPr>
+          <a:lstStyle/>
+          <a:p>
+            <a:pPr algn="ctr"/>
+            <a:r>
+              <a:rPr sz="1050" b="1" i="0" u="none">
+                <a:solidFill>
+                  <a:srgbClr val="0D9488"/>
+                </a:solidFill>
+                <a:latin typeface="Poppins"/>
+              </a:rPr>
+              <a:t>PROCESAMIENTO</a:t>
+            </a:r>
+          </a:p>
+        </p:txBody>
+      </p:sp>
+      <p:sp>
+        <p:nvSpPr>
+          <p:cNvPr id="13" name="TextBox 12"/>
+          <p:cNvSpPr txBox="1"/>
+          <p:nvPr/>
+        </p:nvSpPr>
+        <p:spPr>
+          <a:xfrm>
+            <a:off x="4955857" y="2919412"/>
+            <a:ext cx="2280285" cy="285750"/>
+          </a:xfrm>
+          <a:prstGeom prst="rect">
+            <a:avLst/>
+          </a:prstGeom>
+          <a:noFill/>
+        </p:spPr>
+        <p:txBody>
+          <a:bodyPr wrap="square" lIns="0" tIns="0" rIns="0" bIns="0" anchor="t">
+            <a:spAutoFit/>
+          </a:bodyPr>
+          <a:lstStyle/>
+          <a:p>
+            <a:pPr algn="ctr"/>
+            <a:r>
+              <a:rPr sz="1500" b="1" i="0" u="none">
+                <a:solidFill>
+                  <a:srgbClr val="0F172A"/>
+                </a:solidFill>
+                <a:latin typeface="Poppins"/>
+              </a:rPr>
+              <a:t>Silver Layer</a:t>
+            </a:r>
+          </a:p>
+        </p:txBody>
+      </p:sp>
+      <p:sp>
+        <p:nvSpPr>
+          <p:cNvPr id="14" name="TextBox 13"/>
+          <p:cNvSpPr txBox="1"/>
+          <p:nvPr/>
+        </p:nvSpPr>
+        <p:spPr>
+          <a:xfrm>
+            <a:off x="5010150" y="3281362"/>
+            <a:ext cx="2171700" cy="792360"/>
+          </a:xfrm>
+          <a:prstGeom prst="rect">
+            <a:avLst/>
+          </a:prstGeom>
+          <a:noFill/>
+        </p:spPr>
+        <p:txBody>
+          <a:bodyPr wrap="square" lIns="0" tIns="0" rIns="0" bIns="0" anchor="t">
+            <a:spAutoFit/>
+          </a:bodyPr>
+          <a:lstStyle/>
+          <a:p>
+            <a:pPr algn="ctr">
+              <a:lnSpc>
+                <a:spcPts val="1560"/>
+              </a:lnSpc>
+            </a:pPr>
+            <a:r>
+              <a:rPr sz="975" b="0" i="0" u="none">
+                <a:solidFill>
+                  <a:srgbClr val="0F172A"/>
+                </a:solidFill>
+                <a:latin typeface="Inter SemiBold"/>
+              </a:rPr>
+              <a:t>Python / pandas</a:t>
+            </a:r>
+            <a:r>
+              <a:t>
+</a:t>
+            </a:r>
+            <a:r>
+              <a:rPr sz="975" b="0" i="0" u="none">
+                <a:solidFill>
+                  <a:srgbClr val="64748B"/>
+                </a:solidFill>
+                <a:latin typeface="Inter"/>
+              </a:rPr>
+              <a:t> Lectura, parseo de JSON y limpieza profunda de nulos, duplicados y formatos.</a:t>
+            </a:r>
+          </a:p>
+        </p:txBody>
+      </p:sp>
+      <p:pic>
+        <p:nvPicPr>
+          <p:cNvPr id="15" name="Picture 14" descr="image.png"/>
+          <p:cNvPicPr>
+            <a:picLocks noChangeAspect="1"/>
+          </p:cNvPicPr>
+          <p:nvPr/>
+        </p:nvPicPr>
+        <p:blipFill>
+          <a:blip r:embed="rId6"/>
+          <a:stretch>
+            <a:fillRect/>
+          </a:stretch>
+        </p:blipFill>
+        <p:spPr>
+          <a:xfrm>
+            <a:off x="7962900" y="3225105"/>
+            <a:ext cx="266700" cy="266700"/>
+          </a:xfrm>
+          <a:prstGeom prst="rect">
+            <a:avLst/>
+          </a:prstGeom>
+        </p:spPr>
+      </p:pic>
+      <p:sp>
+        <p:nvSpPr>
+          <p:cNvPr id="16" name="TextBox 15"/>
+          <p:cNvSpPr txBox="1"/>
+          <p:nvPr/>
+        </p:nvSpPr>
+        <p:spPr>
+          <a:xfrm>
+            <a:off x="8956357" y="2643187"/>
+            <a:ext cx="2280285" cy="200025"/>
+          </a:xfrm>
+          <a:prstGeom prst="rect">
+            <a:avLst/>
+          </a:prstGeom>
+          <a:noFill/>
+        </p:spPr>
+        <p:txBody>
+          <a:bodyPr wrap="square" lIns="0" tIns="0" rIns="0" bIns="0" anchor="t">
+            <a:spAutoFit/>
+          </a:bodyPr>
+          <a:lstStyle/>
+          <a:p>
+            <a:pPr algn="ctr"/>
+            <a:r>
+              <a:rPr sz="1050" b="1" i="0" u="none">
+                <a:solidFill>
+                  <a:srgbClr val="0D9488"/>
+                </a:solidFill>
+                <a:latin typeface="Poppins"/>
+              </a:rPr>
+              <a:t>CONSOLIDACIÓN</a:t>
+            </a:r>
+          </a:p>
+        </p:txBody>
+      </p:sp>
+      <p:sp>
+        <p:nvSpPr>
+          <p:cNvPr id="17" name="TextBox 16"/>
+          <p:cNvSpPr txBox="1"/>
+          <p:nvPr/>
+        </p:nvSpPr>
+        <p:spPr>
+          <a:xfrm>
+            <a:off x="8956357" y="2919412"/>
+            <a:ext cx="2280285" cy="285750"/>
+          </a:xfrm>
+          <a:prstGeom prst="rect">
+            <a:avLst/>
+          </a:prstGeom>
+          <a:noFill/>
+        </p:spPr>
+        <p:txBody>
+          <a:bodyPr wrap="square" lIns="0" tIns="0" rIns="0" bIns="0" anchor="t">
+            <a:spAutoFit/>
+          </a:bodyPr>
+          <a:lstStyle/>
+          <a:p>
+            <a:pPr algn="ctr"/>
+            <a:r>
+              <a:rPr sz="1500" b="1" i="0" u="none">
+                <a:solidFill>
+                  <a:srgbClr val="0F172A"/>
+                </a:solidFill>
+                <a:latin typeface="Poppins"/>
+              </a:rPr>
+              <a:t>Gold Layer</a:t>
+            </a:r>
+          </a:p>
+        </p:txBody>
+      </p:sp>
+      <p:sp>
+        <p:nvSpPr>
+          <p:cNvPr id="18" name="TextBox 17"/>
+          <p:cNvSpPr txBox="1"/>
+          <p:nvPr/>
+        </p:nvSpPr>
+        <p:spPr>
+          <a:xfrm>
+            <a:off x="9010650" y="3281362"/>
+            <a:ext cx="2171700" cy="792360"/>
+          </a:xfrm>
+          <a:prstGeom prst="rect">
+            <a:avLst/>
+          </a:prstGeom>
+          <a:noFill/>
+        </p:spPr>
+        <p:txBody>
+          <a:bodyPr wrap="square" lIns="0" tIns="0" rIns="0" bIns="0" anchor="t">
+            <a:spAutoFit/>
+          </a:bodyPr>
+          <a:lstStyle/>
+          <a:p>
+            <a:pPr algn="ctr">
+              <a:lnSpc>
+                <a:spcPts val="1560"/>
+              </a:lnSpc>
+            </a:pPr>
+            <a:r>
+              <a:rPr sz="975" b="0" i="0" u="none">
+                <a:solidFill>
+                  <a:srgbClr val="0F172A"/>
+                </a:solidFill>
+                <a:latin typeface="Inter SemiBold"/>
+              </a:rPr>
+              <a:t>Oracle Views ➔ Power BI</a:t>
+            </a:r>
+            <a:r>
+              <a:t>
+</a:t>
+            </a:r>
+            <a:r>
+              <a:rPr sz="975" b="0" i="0" u="none">
+                <a:solidFill>
+                  <a:srgbClr val="64748B"/>
+                </a:solidFill>
+                <a:latin typeface="Inter"/>
+              </a:rPr>
+              <a:t> 6 vistas Gold optimizadas, listas para consumo directo desde reportes analíticos.</a:t>
+            </a:r>
+          </a:p>
+        </p:txBody>
+      </p:sp>
+      <p:pic>
+        <p:nvPicPr>
+          <p:cNvPr id="19" name="Picture 18" descr="image.png"/>
+          <p:cNvPicPr>
+            <a:picLocks noChangeAspect="1"/>
+          </p:cNvPicPr>
+          <p:nvPr/>
+        </p:nvPicPr>
+        <p:blipFill>
+          <a:blip r:embed="rId7"/>
+          <a:stretch>
+            <a:fillRect/>
+          </a:stretch>
+        </p:blipFill>
+        <p:spPr>
+          <a:xfrm>
+            <a:off x="2400300" y="4988123"/>
+            <a:ext cx="133350" cy="133350"/>
+          </a:xfrm>
+          <a:prstGeom prst="rect">
+            <a:avLst/>
+          </a:prstGeom>
+        </p:spPr>
+      </p:pic>
+      <p:sp>
+        <p:nvSpPr>
+          <p:cNvPr id="20" name="TextBox 19"/>
+          <p:cNvSpPr txBox="1"/>
+          <p:nvPr/>
+        </p:nvSpPr>
+        <p:spPr>
+          <a:xfrm>
+            <a:off x="914400" y="571500"/>
+            <a:ext cx="11041380" cy="434280"/>
+          </a:xfrm>
+          <a:prstGeom prst="rect">
+            <a:avLst/>
+          </a:prstGeom>
+          <a:noFill/>
+        </p:spPr>
+        <p:txBody>
+          <a:bodyPr wrap="square" lIns="0" tIns="0" rIns="0" bIns="0" anchor="ctr">
+            <a:spAutoFit/>
+          </a:bodyPr>
+          <a:lstStyle/>
+          <a:p>
+            <a:pPr algn="l">
+              <a:lnSpc>
+                <a:spcPts val="3420"/>
+              </a:lnSpc>
+            </a:pPr>
+            <a:r>
+              <a:rPr sz="2850" b="1" i="0" u="none">
+                <a:solidFill>
+                  <a:srgbClr val="0F172A"/>
+                </a:solidFill>
+                <a:latin typeface="Poppins"/>
+              </a:rPr>
+              <a:t>Flujo Completo de Ingesta y Transformación</a:t>
+            </a:r>
+          </a:p>
+        </p:txBody>
+      </p:sp>
+      <p:sp>
+        <p:nvSpPr>
+          <p:cNvPr id="21" name="Rectangle 20"/>
           <p:cNvSpPr/>
           <p:nvPr/>
         </p:nvSpPr>
         <p:spPr>
           <a:xfrm>
-            <a:off x="5524500" y="1857375"/>
-            <a:ext cx="1143000" cy="38100"/>
+            <a:off x="762000" y="571500"/>
+            <a:ext cx="57150" cy="434280"/>
           </a:xfrm>
           <a:prstGeom prst="rect">
             <a:avLst/>
@@ -5662,45 +6815,6 @@
           <a:p>
             <a:pPr algn="ctr"/>
             <a:endParaRPr/>
-          </a:p>
-        </p:txBody>
-      </p:sp>
-      <p:sp>
-        <p:nvSpPr>
-          <p:cNvPr id="6" name="TextBox 5"/>
-          <p:cNvSpPr txBox="1"/>
-          <p:nvPr/>
-        </p:nvSpPr>
-        <p:spPr>
-          <a:xfrm>
-            <a:off x="2286000" y="2124075"/>
-            <a:ext cx="7620000" cy="609600"/>
-          </a:xfrm>
-          <a:prstGeom prst="rect">
-            <a:avLst/>
-          </a:prstGeom>
-          <a:noFill/>
-        </p:spPr>
-        <p:txBody>
-          <a:bodyPr wrap="square" lIns="0" tIns="0" rIns="0" bIns="0" anchor="t">
-            <a:spAutoFit/>
-          </a:bodyPr>
-          <a:lstStyle/>
-          <a:p>
-            <a:pPr algn="ctr">
-              <a:lnSpc>
-                <a:spcPts val="2400"/>
-              </a:lnSpc>
-            </a:pPr>
-            <a:r>
-              <a:rPr sz="1500" b="0" i="0" u="none">
-                <a:solidFill>
-                  <a:srgbClr val="64748B"/>
-                </a:solidFill>
-                <a:latin typeface="Inter"/>
-              </a:rPr>
-              <a:t>Estructura del flujo de datos end-to-end diseñado para ingerir, validar, limpiar y modelar información corporativa crucial de 14 indicadores clave.</a:t>
-            </a:r>
           </a:p>
         </p:txBody>
       </p:sp>
@@ -5761,169 +6875,16 @@
           </a:prstGeom>
         </p:spPr>
       </p:pic>
-      <p:pic>
-        <p:nvPicPr>
-          <p:cNvPr id="3" name="Picture 2" descr="image.png"/>
-          <p:cNvPicPr>
-            <a:picLocks noChangeAspect="1"/>
-          </p:cNvPicPr>
-          <p:nvPr/>
-        </p:nvPicPr>
-        <p:blipFill>
-          <a:blip r:embed="rId3"/>
-          <a:stretch>
-            <a:fillRect/>
-          </a:stretch>
-        </p:blipFill>
-        <p:spPr>
-          <a:xfrm>
-            <a:off x="762000" y="4797623"/>
-            <a:ext cx="10668000" cy="518070"/>
-          </a:xfrm>
-          <a:prstGeom prst="rect">
-            <a:avLst/>
-          </a:prstGeom>
-        </p:spPr>
-      </p:pic>
-      <p:pic>
-        <p:nvPicPr>
-          <p:cNvPr id="4" name="Picture 3" descr="image.png"/>
-          <p:cNvPicPr>
-            <a:picLocks noChangeAspect="1"/>
-          </p:cNvPicPr>
-          <p:nvPr/>
-        </p:nvPicPr>
-        <p:blipFill>
-          <a:blip r:embed="rId4"/>
-          <a:stretch>
-            <a:fillRect/>
-          </a:stretch>
-        </p:blipFill>
-        <p:spPr>
-          <a:xfrm>
-            <a:off x="762000" y="2395537"/>
-            <a:ext cx="2667000" cy="1925835"/>
-          </a:xfrm>
-          <a:prstGeom prst="rect">
-            <a:avLst/>
-          </a:prstGeom>
-        </p:spPr>
-      </p:pic>
-      <p:pic>
-        <p:nvPicPr>
-          <p:cNvPr id="5" name="Picture 4" descr="image.png"/>
-          <p:cNvPicPr>
-            <a:picLocks noChangeAspect="1"/>
-          </p:cNvPicPr>
-          <p:nvPr/>
-        </p:nvPicPr>
-        <p:blipFill>
-          <a:blip r:embed="rId5"/>
-          <a:stretch>
-            <a:fillRect/>
-          </a:stretch>
-        </p:blipFill>
-        <p:spPr>
-          <a:xfrm>
-            <a:off x="4762500" y="2395537"/>
-            <a:ext cx="2667000" cy="1925835"/>
-          </a:xfrm>
-          <a:prstGeom prst="rect">
-            <a:avLst/>
-          </a:prstGeom>
-        </p:spPr>
-      </p:pic>
-      <p:pic>
-        <p:nvPicPr>
-          <p:cNvPr id="6" name="Picture 5" descr="image.png"/>
-          <p:cNvPicPr>
-            <a:picLocks noChangeAspect="1"/>
-          </p:cNvPicPr>
-          <p:nvPr/>
-        </p:nvPicPr>
-        <p:blipFill>
-          <a:blip r:embed="rId4"/>
-          <a:stretch>
-            <a:fillRect/>
-          </a:stretch>
-        </p:blipFill>
-        <p:spPr>
-          <a:xfrm>
-            <a:off x="8763000" y="2395537"/>
-            <a:ext cx="2667000" cy="1925835"/>
-          </a:xfrm>
-          <a:prstGeom prst="rect">
-            <a:avLst/>
-          </a:prstGeom>
-        </p:spPr>
-      </p:pic>
-      <p:sp>
-        <p:nvSpPr>
-          <p:cNvPr id="7" name="TextBox 6"/>
+      <p:sp>
+        <p:nvSpPr>
+          <p:cNvPr id="3" name="TextBox 2"/>
           <p:cNvSpPr txBox="1"/>
           <p:nvPr/>
         </p:nvSpPr>
         <p:spPr>
           <a:xfrm>
-            <a:off x="914400" y="4950023"/>
-            <a:ext cx="10363200" cy="213270"/>
-          </a:xfrm>
-          <a:prstGeom prst="rect">
-            <a:avLst/>
-          </a:prstGeom>
-          <a:noFill/>
-        </p:spPr>
-        <p:txBody>
-          <a:bodyPr wrap="square" lIns="209550" tIns="0" rIns="0" bIns="0" anchor="t">
-            <a:spAutoFit/>
-          </a:bodyPr>
-          <a:lstStyle/>
-          <a:p>
-            <a:pPr algn="ctr">
-              <a:lnSpc>
-                <a:spcPts val="1679"/>
-              </a:lnSpc>
-            </a:pPr>
-            <a:r>
-              <a:rPr sz="1050" b="0" i="0" u="none">
-                <a:solidFill>
-                  <a:srgbClr val="475569"/>
-                </a:solidFill>
-                <a:latin typeface="Inter"/>
-              </a:rPr>
-              <a:t>Este flujo garantiza el aislamiento de capas de datos cumpliendo con las mejores prácticas de </a:t>
-            </a:r>
-            <a:r>
-              <a:rPr sz="1050" b="0" i="0" u="none">
-                <a:solidFill>
-                  <a:srgbClr val="0F172A"/>
-                </a:solidFill>
-                <a:latin typeface="Inter SemiBold"/>
-              </a:rPr>
-              <a:t>Data Warehousing</a:t>
-            </a:r>
-            <a:r>
-              <a:rPr sz="1050" b="0" i="0" u="none">
-                <a:solidFill>
-                  <a:srgbClr val="475569"/>
-                </a:solidFill>
-                <a:latin typeface="Inter"/>
-              </a:rPr>
-              <a:t>.</a:t>
-            </a:r>
-          </a:p>
-        </p:txBody>
-      </p:sp>
-      <p:sp>
-        <p:nvSpPr>
-          <p:cNvPr id="8" name="TextBox 7"/>
-          <p:cNvSpPr txBox="1"/>
-          <p:nvPr/>
-        </p:nvSpPr>
-        <p:spPr>
-          <a:xfrm>
-            <a:off x="955357" y="2643187"/>
-            <a:ext cx="2280285" cy="200025"/>
+            <a:off x="2095500" y="571500"/>
+            <a:ext cx="8001000" cy="200025"/>
           </a:xfrm>
           <a:prstGeom prst="rect">
             <a:avLst/>
@@ -5944,21 +6905,21 @@
                 </a:solidFill>
                 <a:latin typeface="Poppins"/>
               </a:rPr>
-              <a:t>CARGA INICIAL</a:t>
-            </a:r>
-          </a:p>
-        </p:txBody>
-      </p:sp>
-      <p:sp>
-        <p:nvSpPr>
-          <p:cNvPr id="9" name="TextBox 8"/>
+              <a:t>SECCIÓN 01</a:t>
+            </a:r>
+          </a:p>
+        </p:txBody>
+      </p:sp>
+      <p:sp>
+        <p:nvSpPr>
+          <p:cNvPr id="4" name="TextBox 3"/>
           <p:cNvSpPr txBox="1"/>
           <p:nvPr/>
         </p:nvSpPr>
         <p:spPr>
           <a:xfrm>
-            <a:off x="955357" y="2919412"/>
-            <a:ext cx="2280285" cy="285750"/>
+            <a:off x="2095500" y="885825"/>
+            <a:ext cx="8001000" cy="742950"/>
           </a:xfrm>
           <a:prstGeom prst="rect">
             <a:avLst/>
@@ -5973,434 +6934,27 @@
           <a:p>
             <a:pPr algn="ctr"/>
             <a:r>
-              <a:rPr sz="1500" b="1" i="0" u="none">
+              <a:rPr sz="3900" b="1" i="0" u="none">
                 <a:solidFill>
                   <a:srgbClr val="0F172A"/>
                 </a:solidFill>
                 <a:latin typeface="Poppins"/>
               </a:rPr>
-              <a:t>Bronze Layer</a:t>
-            </a:r>
-          </a:p>
-        </p:txBody>
-      </p:sp>
-      <p:sp>
-        <p:nvSpPr>
-          <p:cNvPr id="10" name="TextBox 9"/>
-          <p:cNvSpPr txBox="1"/>
-          <p:nvPr/>
-        </p:nvSpPr>
-        <p:spPr>
-          <a:xfrm>
-            <a:off x="1009650" y="3281362"/>
-            <a:ext cx="2171700" cy="792360"/>
-          </a:xfrm>
-          <a:prstGeom prst="rect">
-            <a:avLst/>
-          </a:prstGeom>
-          <a:noFill/>
-        </p:spPr>
-        <p:txBody>
-          <a:bodyPr wrap="square" lIns="0" tIns="0" rIns="0" bIns="0" anchor="t">
-            <a:spAutoFit/>
-          </a:bodyPr>
-          <a:lstStyle/>
-          <a:p>
-            <a:pPr algn="ctr">
-              <a:lnSpc>
-                <a:spcPts val="1560"/>
-              </a:lnSpc>
-            </a:pPr>
-            <a:r>
-              <a:rPr sz="975" b="0" i="0" u="none">
-                <a:solidFill>
-                  <a:srgbClr val="0F172A"/>
-                </a:solidFill>
-                <a:latin typeface="Inter SemiBold"/>
-              </a:rPr>
-              <a:t>Oracle (TAB_CONSOLIDADO)</a:t>
-            </a:r>
-            <a:r>
-              <a:t>
-</a:t>
-            </a:r>
-            <a:r>
-              <a:rPr sz="975" b="0" i="0" u="none">
-                <a:solidFill>
-                  <a:srgbClr val="64748B"/>
-                </a:solidFill>
-                <a:latin typeface="Inter"/>
-              </a:rPr>
-              <a:t> Datos crudos cargados por RPA. Almacena 14 indicadores en formato JSON crudo.</a:t>
-            </a:r>
-          </a:p>
-        </p:txBody>
-      </p:sp>
-      <p:pic>
-        <p:nvPicPr>
-          <p:cNvPr id="11" name="Picture 10" descr="image.png"/>
-          <p:cNvPicPr>
-            <a:picLocks noChangeAspect="1"/>
-          </p:cNvPicPr>
-          <p:nvPr/>
-        </p:nvPicPr>
-        <p:blipFill>
-          <a:blip r:embed="rId6"/>
-          <a:stretch>
-            <a:fillRect/>
-          </a:stretch>
-        </p:blipFill>
-        <p:spPr>
-          <a:xfrm>
-            <a:off x="3962400" y="3225105"/>
-            <a:ext cx="266700" cy="266700"/>
-          </a:xfrm>
-          <a:prstGeom prst="rect">
-            <a:avLst/>
-          </a:prstGeom>
-        </p:spPr>
-      </p:pic>
-      <p:sp>
-        <p:nvSpPr>
-          <p:cNvPr id="12" name="TextBox 11"/>
-          <p:cNvSpPr txBox="1"/>
-          <p:nvPr/>
-        </p:nvSpPr>
-        <p:spPr>
-          <a:xfrm>
-            <a:off x="4955857" y="2643187"/>
-            <a:ext cx="2280285" cy="200025"/>
-          </a:xfrm>
-          <a:prstGeom prst="rect">
-            <a:avLst/>
-          </a:prstGeom>
-          <a:noFill/>
-        </p:spPr>
-        <p:txBody>
-          <a:bodyPr wrap="square" lIns="0" tIns="0" rIns="0" bIns="0" anchor="t">
-            <a:spAutoFit/>
-          </a:bodyPr>
-          <a:lstStyle/>
-          <a:p>
-            <a:pPr algn="ctr"/>
-            <a:r>
-              <a:rPr sz="1050" b="1" i="0" u="none">
-                <a:solidFill>
-                  <a:srgbClr val="0D9488"/>
-                </a:solidFill>
-                <a:latin typeface="Poppins"/>
-              </a:rPr>
-              <a:t>PROCESAMIENTO</a:t>
-            </a:r>
-          </a:p>
-        </p:txBody>
-      </p:sp>
-      <p:sp>
-        <p:nvSpPr>
-          <p:cNvPr id="13" name="TextBox 12"/>
-          <p:cNvSpPr txBox="1"/>
-          <p:nvPr/>
-        </p:nvSpPr>
-        <p:spPr>
-          <a:xfrm>
-            <a:off x="4955857" y="2919412"/>
-            <a:ext cx="2280285" cy="285750"/>
-          </a:xfrm>
-          <a:prstGeom prst="rect">
-            <a:avLst/>
-          </a:prstGeom>
-          <a:noFill/>
-        </p:spPr>
-        <p:txBody>
-          <a:bodyPr wrap="square" lIns="0" tIns="0" rIns="0" bIns="0" anchor="t">
-            <a:spAutoFit/>
-          </a:bodyPr>
-          <a:lstStyle/>
-          <a:p>
-            <a:pPr algn="ctr"/>
-            <a:r>
-              <a:rPr sz="1500" b="1" i="0" u="none">
-                <a:solidFill>
-                  <a:srgbClr val="0F172A"/>
-                </a:solidFill>
-                <a:latin typeface="Poppins"/>
-              </a:rPr>
-              <a:t>Silver Layer</a:t>
-            </a:r>
-          </a:p>
-        </p:txBody>
-      </p:sp>
-      <p:sp>
-        <p:nvSpPr>
-          <p:cNvPr id="14" name="TextBox 13"/>
-          <p:cNvSpPr txBox="1"/>
-          <p:nvPr/>
-        </p:nvSpPr>
-        <p:spPr>
-          <a:xfrm>
-            <a:off x="5010150" y="3281362"/>
-            <a:ext cx="2171700" cy="792360"/>
-          </a:xfrm>
-          <a:prstGeom prst="rect">
-            <a:avLst/>
-          </a:prstGeom>
-          <a:noFill/>
-        </p:spPr>
-        <p:txBody>
-          <a:bodyPr wrap="square" lIns="0" tIns="0" rIns="0" bIns="0" anchor="t">
-            <a:spAutoFit/>
-          </a:bodyPr>
-          <a:lstStyle/>
-          <a:p>
-            <a:pPr algn="ctr">
-              <a:lnSpc>
-                <a:spcPts val="1560"/>
-              </a:lnSpc>
-            </a:pPr>
-            <a:r>
-              <a:rPr sz="975" b="0" i="0" u="none">
-                <a:solidFill>
-                  <a:srgbClr val="0F172A"/>
-                </a:solidFill>
-                <a:latin typeface="Inter SemiBold"/>
-              </a:rPr>
-              <a:t>Python / pandas</a:t>
-            </a:r>
-            <a:r>
-              <a:t>
-</a:t>
-            </a:r>
-            <a:r>
-              <a:rPr sz="975" b="0" i="0" u="none">
-                <a:solidFill>
-                  <a:srgbClr val="64748B"/>
-                </a:solidFill>
-                <a:latin typeface="Inter"/>
-              </a:rPr>
-              <a:t> Lectura, parseo de JSON y limpieza profunda de nulos, duplicados y formatos.</a:t>
-            </a:r>
-          </a:p>
-        </p:txBody>
-      </p:sp>
-      <p:pic>
-        <p:nvPicPr>
-          <p:cNvPr id="15" name="Picture 14" descr="image.png"/>
-          <p:cNvPicPr>
-            <a:picLocks noChangeAspect="1"/>
-          </p:cNvPicPr>
-          <p:nvPr/>
-        </p:nvPicPr>
-        <p:blipFill>
-          <a:blip r:embed="rId6"/>
-          <a:stretch>
-            <a:fillRect/>
-          </a:stretch>
-        </p:blipFill>
-        <p:spPr>
-          <a:xfrm>
-            <a:off x="7962900" y="3225105"/>
-            <a:ext cx="266700" cy="266700"/>
-          </a:xfrm>
-          <a:prstGeom prst="rect">
-            <a:avLst/>
-          </a:prstGeom>
-        </p:spPr>
-      </p:pic>
-      <p:sp>
-        <p:nvSpPr>
-          <p:cNvPr id="16" name="TextBox 15"/>
-          <p:cNvSpPr txBox="1"/>
-          <p:nvPr/>
-        </p:nvSpPr>
-        <p:spPr>
-          <a:xfrm>
-            <a:off x="8956357" y="2643187"/>
-            <a:ext cx="2280285" cy="200025"/>
-          </a:xfrm>
-          <a:prstGeom prst="rect">
-            <a:avLst/>
-          </a:prstGeom>
-          <a:noFill/>
-        </p:spPr>
-        <p:txBody>
-          <a:bodyPr wrap="square" lIns="0" tIns="0" rIns="0" bIns="0" anchor="t">
-            <a:spAutoFit/>
-          </a:bodyPr>
-          <a:lstStyle/>
-          <a:p>
-            <a:pPr algn="ctr"/>
-            <a:r>
-              <a:rPr sz="1050" b="1" i="0" u="none">
-                <a:solidFill>
-                  <a:srgbClr val="0D9488"/>
-                </a:solidFill>
-                <a:latin typeface="Poppins"/>
-              </a:rPr>
-              <a:t>CONSOLIDACIÓN</a:t>
-            </a:r>
-          </a:p>
-        </p:txBody>
-      </p:sp>
-      <p:sp>
-        <p:nvSpPr>
-          <p:cNvPr id="17" name="TextBox 16"/>
-          <p:cNvSpPr txBox="1"/>
-          <p:nvPr/>
-        </p:nvSpPr>
-        <p:spPr>
-          <a:xfrm>
-            <a:off x="8956357" y="2919412"/>
-            <a:ext cx="2280285" cy="285750"/>
-          </a:xfrm>
-          <a:prstGeom prst="rect">
-            <a:avLst/>
-          </a:prstGeom>
-          <a:noFill/>
-        </p:spPr>
-        <p:txBody>
-          <a:bodyPr wrap="square" lIns="0" tIns="0" rIns="0" bIns="0" anchor="t">
-            <a:spAutoFit/>
-          </a:bodyPr>
-          <a:lstStyle/>
-          <a:p>
-            <a:pPr algn="ctr"/>
-            <a:r>
-              <a:rPr sz="1500" b="1" i="0" u="none">
-                <a:solidFill>
-                  <a:srgbClr val="0F172A"/>
-                </a:solidFill>
-                <a:latin typeface="Poppins"/>
-              </a:rPr>
-              <a:t>Gold Layer</a:t>
-            </a:r>
-          </a:p>
-        </p:txBody>
-      </p:sp>
-      <p:sp>
-        <p:nvSpPr>
-          <p:cNvPr id="18" name="TextBox 17"/>
-          <p:cNvSpPr txBox="1"/>
-          <p:nvPr/>
-        </p:nvSpPr>
-        <p:spPr>
-          <a:xfrm>
-            <a:off x="9010650" y="3281362"/>
-            <a:ext cx="2171700" cy="792360"/>
-          </a:xfrm>
-          <a:prstGeom prst="rect">
-            <a:avLst/>
-          </a:prstGeom>
-          <a:noFill/>
-        </p:spPr>
-        <p:txBody>
-          <a:bodyPr wrap="square" lIns="0" tIns="0" rIns="0" bIns="0" anchor="t">
-            <a:spAutoFit/>
-          </a:bodyPr>
-          <a:lstStyle/>
-          <a:p>
-            <a:pPr algn="ctr">
-              <a:lnSpc>
-                <a:spcPts val="1560"/>
-              </a:lnSpc>
-            </a:pPr>
-            <a:r>
-              <a:rPr sz="975" b="0" i="0" u="none">
-                <a:solidFill>
-                  <a:srgbClr val="0F172A"/>
-                </a:solidFill>
-                <a:latin typeface="Inter SemiBold"/>
-              </a:rPr>
-              <a:t>Oracle Views ➔ Power BI</a:t>
-            </a:r>
-            <a:r>
-              <a:t>
-</a:t>
-            </a:r>
-            <a:r>
-              <a:rPr sz="975" b="0" i="0" u="none">
-                <a:solidFill>
-                  <a:srgbClr val="64748B"/>
-                </a:solidFill>
-                <a:latin typeface="Inter"/>
-              </a:rPr>
-              <a:t> 6 vistas Gold optimizadas, listas para consumo directo desde reportes analíticos.</a:t>
-            </a:r>
-          </a:p>
-        </p:txBody>
-      </p:sp>
-      <p:pic>
-        <p:nvPicPr>
-          <p:cNvPr id="19" name="Picture 18" descr="image.png"/>
-          <p:cNvPicPr>
-            <a:picLocks noChangeAspect="1"/>
-          </p:cNvPicPr>
-          <p:nvPr/>
-        </p:nvPicPr>
-        <p:blipFill>
-          <a:blip r:embed="rId7"/>
-          <a:stretch>
-            <a:fillRect/>
-          </a:stretch>
-        </p:blipFill>
-        <p:spPr>
-          <a:xfrm>
-            <a:off x="2400300" y="4988123"/>
-            <a:ext cx="133350" cy="133350"/>
-          </a:xfrm>
-          <a:prstGeom prst="rect">
-            <a:avLst/>
-          </a:prstGeom>
-        </p:spPr>
-      </p:pic>
-      <p:sp>
-        <p:nvSpPr>
-          <p:cNvPr id="20" name="TextBox 19"/>
-          <p:cNvSpPr txBox="1"/>
-          <p:nvPr/>
-        </p:nvSpPr>
-        <p:spPr>
-          <a:xfrm>
-            <a:off x="914400" y="571500"/>
-            <a:ext cx="11041380" cy="434280"/>
-          </a:xfrm>
-          <a:prstGeom prst="rect">
-            <a:avLst/>
-          </a:prstGeom>
-          <a:noFill/>
-        </p:spPr>
-        <p:txBody>
-          <a:bodyPr wrap="square" lIns="0" tIns="0" rIns="0" bIns="0" anchor="ctr">
-            <a:spAutoFit/>
-          </a:bodyPr>
-          <a:lstStyle/>
-          <a:p>
-            <a:pPr algn="l">
-              <a:lnSpc>
-                <a:spcPts val="3420"/>
-              </a:lnSpc>
-            </a:pPr>
-            <a:r>
-              <a:rPr sz="2850" b="1" i="0" u="none">
-                <a:solidFill>
-                  <a:srgbClr val="0F172A"/>
-                </a:solidFill>
-                <a:latin typeface="Poppins"/>
-              </a:rPr>
-              <a:t>Flujo Completo de Ingesta y Transformación</a:t>
-            </a:r>
-          </a:p>
-        </p:txBody>
-      </p:sp>
-      <p:sp>
-        <p:nvSpPr>
-          <p:cNvPr id="21" name="Rectangle 20"/>
+              <a:t>Arquitectura del Pipeline</a:t>
+            </a:r>
+          </a:p>
+        </p:txBody>
+      </p:sp>
+      <p:sp>
+        <p:nvSpPr>
+          <p:cNvPr id="5" name="Rectangle 4"/>
           <p:cNvSpPr/>
           <p:nvPr/>
         </p:nvSpPr>
         <p:spPr>
           <a:xfrm>
-            <a:off x="762000" y="571500"/>
-            <a:ext cx="57150" cy="434280"/>
+            <a:off x="5524500" y="1857375"/>
+            <a:ext cx="1143000" cy="38100"/>
           </a:xfrm>
           <a:prstGeom prst="rect">
             <a:avLst/>
@@ -6436,6 +6990,66 @@
           </a:p>
         </p:txBody>
       </p:sp>
+      <p:pic>
+        <p:nvPicPr>
+          <p:cNvPr id="10" name="Imagen 9">
+            <a:extLst>
+              <a:ext uri="{FF2B5EF4-FFF2-40B4-BE49-F238E27FC236}">
+                <a16:creationId xmlns:a16="http://schemas.microsoft.com/office/drawing/2014/main" id="{16671C79-BA3C-AF5A-75B0-04852F88D2BB}"/>
+              </a:ext>
+            </a:extLst>
+          </p:cNvPr>
+          <p:cNvPicPr>
+            <a:picLocks noChangeAspect="1"/>
+          </p:cNvPicPr>
+          <p:nvPr/>
+        </p:nvPicPr>
+        <p:blipFill>
+          <a:blip r:embed="rId3"/>
+          <a:stretch>
+            <a:fillRect/>
+          </a:stretch>
+        </p:blipFill>
+        <p:spPr>
+          <a:xfrm>
+            <a:off x="491422" y="2976529"/>
+            <a:ext cx="11027096" cy="762066"/>
+          </a:xfrm>
+          <a:prstGeom prst="rect">
+            <a:avLst/>
+          </a:prstGeom>
+        </p:spPr>
+      </p:pic>
+      <p:pic>
+        <p:nvPicPr>
+          <p:cNvPr id="12" name="Imagen 11">
+            <a:extLst>
+              <a:ext uri="{FF2B5EF4-FFF2-40B4-BE49-F238E27FC236}">
+                <a16:creationId xmlns:a16="http://schemas.microsoft.com/office/drawing/2014/main" id="{B57AB85F-0FBD-680F-02E8-BF421B11DF01}"/>
+              </a:ext>
+            </a:extLst>
+          </p:cNvPr>
+          <p:cNvPicPr>
+            <a:picLocks noChangeAspect="1"/>
+          </p:cNvPicPr>
+          <p:nvPr/>
+        </p:nvPicPr>
+        <p:blipFill>
+          <a:blip r:embed="rId4"/>
+          <a:stretch>
+            <a:fillRect/>
+          </a:stretch>
+        </p:blipFill>
+        <p:spPr>
+          <a:xfrm>
+            <a:off x="498207" y="2119279"/>
+            <a:ext cx="11202371" cy="624894"/>
+          </a:xfrm>
+          <a:prstGeom prst="rect">
+            <a:avLst/>
+          </a:prstGeom>
+        </p:spPr>
+      </p:pic>
     </p:spTree>
   </p:cSld>
   <p:clrMapOvr>
@@ -6493,88 +7107,16 @@
           </a:prstGeom>
         </p:spPr>
       </p:pic>
-      <p:pic>
-        <p:nvPicPr>
-          <p:cNvPr id="3" name="Picture 2" descr="image.png"/>
-          <p:cNvPicPr>
-            <a:picLocks noChangeAspect="1"/>
-          </p:cNvPicPr>
-          <p:nvPr/>
-        </p:nvPicPr>
-        <p:blipFill>
-          <a:blip r:embed="rId3"/>
-          <a:stretch>
-            <a:fillRect/>
-          </a:stretch>
-        </p:blipFill>
-        <p:spPr>
-          <a:xfrm>
-            <a:off x="762000" y="1234380"/>
-            <a:ext cx="3403550" cy="2362200"/>
-          </a:xfrm>
-          <a:prstGeom prst="rect">
-            <a:avLst/>
-          </a:prstGeom>
-        </p:spPr>
-      </p:pic>
-      <p:pic>
-        <p:nvPicPr>
-          <p:cNvPr id="4" name="Picture 3" descr="image.png"/>
-          <p:cNvPicPr>
-            <a:picLocks noChangeAspect="1"/>
-          </p:cNvPicPr>
-          <p:nvPr/>
-        </p:nvPicPr>
-        <p:blipFill>
-          <a:blip r:embed="rId4"/>
-          <a:stretch>
-            <a:fillRect/>
-          </a:stretch>
-        </p:blipFill>
-        <p:spPr>
-          <a:xfrm>
-            <a:off x="4394150" y="1234380"/>
-            <a:ext cx="3403550" cy="2362200"/>
-          </a:xfrm>
-          <a:prstGeom prst="rect">
-            <a:avLst/>
-          </a:prstGeom>
-        </p:spPr>
-      </p:pic>
-      <p:pic>
-        <p:nvPicPr>
-          <p:cNvPr id="5" name="Picture 4" descr="image.png"/>
-          <p:cNvPicPr>
-            <a:picLocks noChangeAspect="1"/>
-          </p:cNvPicPr>
-          <p:nvPr/>
-        </p:nvPicPr>
-        <p:blipFill>
-          <a:blip r:embed="rId5"/>
-          <a:stretch>
-            <a:fillRect/>
-          </a:stretch>
-        </p:blipFill>
-        <p:spPr>
-          <a:xfrm>
-            <a:off x="8026300" y="1234380"/>
-            <a:ext cx="3403550" cy="2362200"/>
-          </a:xfrm>
-          <a:prstGeom prst="rect">
-            <a:avLst/>
-          </a:prstGeom>
-        </p:spPr>
-      </p:pic>
-      <p:sp>
-        <p:nvSpPr>
-          <p:cNvPr id="6" name="TextBox 5"/>
+      <p:sp>
+        <p:nvSpPr>
+          <p:cNvPr id="3" name="TextBox 2"/>
           <p:cNvSpPr txBox="1"/>
           <p:nvPr/>
         </p:nvSpPr>
         <p:spPr>
           <a:xfrm>
-            <a:off x="1057275" y="2101155"/>
-            <a:ext cx="2953650" cy="285750"/>
+            <a:off x="2095500" y="571500"/>
+            <a:ext cx="8001000" cy="200025"/>
           </a:xfrm>
           <a:prstGeom prst="rect">
             <a:avLst/>
@@ -6587,29 +7129,29 @@
           </a:bodyPr>
           <a:lstStyle/>
           <a:p>
-            <a:pPr algn="l"/>
-            <a:r>
-              <a:rPr sz="1500" b="1" i="0" u="none">
-                <a:solidFill>
-                  <a:srgbClr val="0F172A"/>
+            <a:pPr algn="ctr"/>
+            <a:r>
+              <a:rPr sz="1050" b="1" i="0" u="none">
+                <a:solidFill>
+                  <a:srgbClr val="0D9488"/>
                 </a:solidFill>
                 <a:latin typeface="Poppins"/>
               </a:rPr>
-              <a:t>Conexión &amp; Orquestación</a:t>
-            </a:r>
-          </a:p>
-        </p:txBody>
-      </p:sp>
-      <p:sp>
-        <p:nvSpPr>
-          <p:cNvPr id="7" name="TextBox 6"/>
+              <a:t>SECCIÓN 02</a:t>
+            </a:r>
+          </a:p>
+        </p:txBody>
+      </p:sp>
+      <p:sp>
+        <p:nvSpPr>
+          <p:cNvPr id="4" name="TextBox 3"/>
           <p:cNvSpPr txBox="1"/>
           <p:nvPr/>
         </p:nvSpPr>
         <p:spPr>
           <a:xfrm>
-            <a:off x="1057275" y="2501205"/>
-            <a:ext cx="2813000" cy="800100"/>
+            <a:off x="2120899" y="771525"/>
+            <a:ext cx="8001000" cy="600164"/>
           </a:xfrm>
           <a:prstGeom prst="rect">
             <a:avLst/>
@@ -6622,331 +7164,44 @@
           </a:bodyPr>
           <a:lstStyle/>
           <a:p>
-            <a:pPr algn="l">
-              <a:lnSpc>
-                <a:spcPts val="1575"/>
-              </a:lnSpc>
-            </a:pPr>
-            <a:r>
-              <a:rPr sz="1050" b="0" i="0" u="none">
-                <a:solidFill>
-                  <a:srgbClr val="0F172A"/>
-                </a:solidFill>
-                <a:latin typeface="Inter SemiBold"/>
-              </a:rPr>
-              <a:t>db.py &amp; load.py:</a:t>
-            </a:r>
-            <a:r>
-              <a:t>
-</a:t>
-            </a:r>
-            <a:r>
-              <a:rPr sz="1050" b="0" i="0" u="none">
-                <a:solidFill>
-                  <a:srgbClr val="64748B"/>
-                </a:solidFill>
-                <a:latin typeface="Inter"/>
-              </a:rPr>
-              <a:t> Administración de la conexión a Oracle en modo Thin. Orquesta la extracción, limpia tablas, inserta por lotes y recrea vistas.</a:t>
-            </a:r>
-          </a:p>
-        </p:txBody>
-      </p:sp>
-      <p:sp>
-        <p:nvSpPr>
-          <p:cNvPr id="8" name="TextBox 7"/>
-          <p:cNvSpPr txBox="1"/>
-          <p:nvPr/>
-        </p:nvSpPr>
-        <p:spPr>
-          <a:xfrm>
-            <a:off x="4689425" y="2101155"/>
-            <a:ext cx="2953650" cy="285750"/>
-          </a:xfrm>
-          <a:prstGeom prst="rect">
-            <a:avLst/>
-          </a:prstGeom>
-          <a:noFill/>
-        </p:spPr>
-        <p:txBody>
-          <a:bodyPr wrap="square" lIns="0" tIns="0" rIns="0" bIns="0" anchor="t">
-            <a:spAutoFit/>
-          </a:bodyPr>
-          <a:lstStyle/>
-          <a:p>
-            <a:pPr algn="l"/>
-            <a:r>
-              <a:rPr sz="1500" b="1" i="0" u="none">
+            <a:pPr algn="ctr"/>
+            <a:r>
+              <a:rPr lang="es-EC" sz="3900" b="1" i="0" u="none" dirty="0" err="1">
                 <a:solidFill>
                   <a:srgbClr val="0F172A"/>
                 </a:solidFill>
                 <a:latin typeface="Poppins"/>
               </a:rPr>
-              <a:t>Módulos de Limpieza</a:t>
-            </a:r>
-          </a:p>
-        </p:txBody>
-      </p:sp>
-      <p:sp>
-        <p:nvSpPr>
-          <p:cNvPr id="9" name="TextBox 8"/>
-          <p:cNvSpPr txBox="1"/>
-          <p:nvPr/>
-        </p:nvSpPr>
-        <p:spPr>
-          <a:xfrm>
-            <a:off x="4689425" y="2501205"/>
-            <a:ext cx="2813000" cy="800100"/>
-          </a:xfrm>
-          <a:prstGeom prst="rect">
-            <a:avLst/>
-          </a:prstGeom>
-          <a:noFill/>
-        </p:spPr>
-        <p:txBody>
-          <a:bodyPr wrap="square" lIns="0" tIns="0" rIns="0" bIns="0" anchor="t">
-            <a:spAutoFit/>
-          </a:bodyPr>
-          <a:lstStyle/>
-          <a:p>
-            <a:pPr algn="l">
-              <a:lnSpc>
-                <a:spcPts val="1575"/>
-              </a:lnSpc>
-            </a:pPr>
-            <a:r>
-              <a:rPr sz="1050" b="0" i="0" u="none">
-                <a:solidFill>
-                  <a:srgbClr val="0F172A"/>
-                </a:solidFill>
-                <a:latin typeface="Inter SemiBold"/>
-              </a:rPr>
-              <a:t>transform/ (*.py):</a:t>
-            </a:r>
-            <a:r>
-              <a:t>
-</a:t>
-            </a:r>
-            <a:r>
-              <a:rPr sz="1050" b="0" i="0" u="none">
-                <a:solidFill>
-                  <a:srgbClr val="64748B"/>
-                </a:solidFill>
-                <a:latin typeface="Inter"/>
-              </a:rPr>
-              <a:t> Limpieza específica por dominio: BCE (PIB, petróleo), Censo (empleo), Mineduc (colegios) y Supercias (empresas).</a:t>
-            </a:r>
-          </a:p>
-        </p:txBody>
-      </p:sp>
-      <p:sp>
-        <p:nvSpPr>
-          <p:cNvPr id="10" name="TextBox 9"/>
-          <p:cNvSpPr txBox="1"/>
-          <p:nvPr/>
-        </p:nvSpPr>
-        <p:spPr>
-          <a:xfrm>
-            <a:off x="8321575" y="2101155"/>
-            <a:ext cx="2953650" cy="285750"/>
-          </a:xfrm>
-          <a:prstGeom prst="rect">
-            <a:avLst/>
-          </a:prstGeom>
-          <a:noFill/>
-        </p:spPr>
-        <p:txBody>
-          <a:bodyPr wrap="square" lIns="0" tIns="0" rIns="0" bIns="0" anchor="t">
-            <a:spAutoFit/>
-          </a:bodyPr>
-          <a:lstStyle/>
-          <a:p>
-            <a:pPr algn="l"/>
-            <a:r>
-              <a:rPr sz="1500" b="1" i="0" u="none">
+              <a:t>Insercción</a:t>
+            </a:r>
+            <a:r>
+              <a:rPr lang="es-EC" sz="3900" b="1" i="0" u="none" dirty="0">
                 <a:solidFill>
                   <a:srgbClr val="0F172A"/>
                 </a:solidFill>
                 <a:latin typeface="Poppins"/>
               </a:rPr>
-              <a:t>Modelado Relacional</a:t>
-            </a:r>
-          </a:p>
-        </p:txBody>
-      </p:sp>
-      <p:sp>
-        <p:nvSpPr>
-          <p:cNvPr id="11" name="TextBox 10"/>
-          <p:cNvSpPr txBox="1"/>
-          <p:nvPr/>
-        </p:nvSpPr>
-        <p:spPr>
-          <a:xfrm>
-            <a:off x="8321575" y="2501205"/>
-            <a:ext cx="2813000" cy="800100"/>
-          </a:xfrm>
-          <a:prstGeom prst="rect">
-            <a:avLst/>
-          </a:prstGeom>
-          <a:noFill/>
-        </p:spPr>
-        <p:txBody>
-          <a:bodyPr wrap="square" lIns="0" tIns="0" rIns="0" bIns="0" anchor="t">
-            <a:spAutoFit/>
-          </a:bodyPr>
-          <a:lstStyle/>
-          <a:p>
-            <a:pPr algn="l">
-              <a:lnSpc>
-                <a:spcPts val="1575"/>
-              </a:lnSpc>
-            </a:pPr>
-            <a:r>
-              <a:rPr sz="1050" b="0" i="0" u="none">
-                <a:solidFill>
-                  <a:srgbClr val="0F172A"/>
-                </a:solidFill>
-                <a:latin typeface="Inter SemiBold"/>
-              </a:rPr>
-              <a:t>sql/gold_views.sql:</a:t>
-            </a:r>
-            <a:r>
-              <a:t>
-</a:t>
-            </a:r>
-            <a:r>
-              <a:rPr sz="1050" b="0" i="0" u="none">
-                <a:solidFill>
-                  <a:srgbClr val="64748B"/>
-                </a:solidFill>
-                <a:latin typeface="Inter"/>
-              </a:rPr>
-              <a:t> Definiciones SQL nativas para generar las vistas agregadas y de negocio de la capa Gold.</a:t>
-            </a:r>
-          </a:p>
-        </p:txBody>
-      </p:sp>
-      <p:pic>
-        <p:nvPicPr>
-          <p:cNvPr id="12" name="Picture 11" descr="image.png"/>
-          <p:cNvPicPr>
-            <a:picLocks noChangeAspect="1"/>
-          </p:cNvPicPr>
-          <p:nvPr/>
-        </p:nvPicPr>
-        <p:blipFill>
-          <a:blip r:embed="rId6"/>
-          <a:stretch>
-            <a:fillRect/>
-          </a:stretch>
-        </p:blipFill>
-        <p:spPr>
-          <a:xfrm>
-            <a:off x="1057275" y="1567755"/>
-            <a:ext cx="257175" cy="342900"/>
-          </a:xfrm>
-          <a:prstGeom prst="rect">
-            <a:avLst/>
-          </a:prstGeom>
-        </p:spPr>
-      </p:pic>
-      <p:pic>
-        <p:nvPicPr>
-          <p:cNvPr id="13" name="Picture 12" descr="image.png"/>
-          <p:cNvPicPr>
-            <a:picLocks noChangeAspect="1"/>
-          </p:cNvPicPr>
-          <p:nvPr/>
-        </p:nvPicPr>
-        <p:blipFill>
-          <a:blip r:embed="rId7"/>
-          <a:stretch>
-            <a:fillRect/>
-          </a:stretch>
-        </p:blipFill>
-        <p:spPr>
-          <a:xfrm>
-            <a:off x="4689425" y="1567755"/>
-            <a:ext cx="342900" cy="342900"/>
-          </a:xfrm>
-          <a:prstGeom prst="rect">
-            <a:avLst/>
-          </a:prstGeom>
-        </p:spPr>
-      </p:pic>
-      <p:pic>
-        <p:nvPicPr>
-          <p:cNvPr id="14" name="Picture 13" descr="image.png"/>
-          <p:cNvPicPr>
-            <a:picLocks noChangeAspect="1"/>
-          </p:cNvPicPr>
-          <p:nvPr/>
-        </p:nvPicPr>
-        <p:blipFill>
-          <a:blip r:embed="rId8"/>
-          <a:stretch>
-            <a:fillRect/>
-          </a:stretch>
-        </p:blipFill>
-        <p:spPr>
-          <a:xfrm>
-            <a:off x="8321575" y="1567755"/>
-            <a:ext cx="304800" cy="342900"/>
-          </a:xfrm>
-          <a:prstGeom prst="rect">
-            <a:avLst/>
-          </a:prstGeom>
-        </p:spPr>
-      </p:pic>
-      <p:sp>
-        <p:nvSpPr>
-          <p:cNvPr id="15" name="TextBox 14"/>
-          <p:cNvSpPr txBox="1"/>
-          <p:nvPr/>
-        </p:nvSpPr>
-        <p:spPr>
-          <a:xfrm>
-            <a:off x="914400" y="571500"/>
-            <a:ext cx="11041380" cy="434280"/>
-          </a:xfrm>
-          <a:prstGeom prst="rect">
-            <a:avLst/>
-          </a:prstGeom>
-          <a:noFill/>
-        </p:spPr>
-        <p:txBody>
-          <a:bodyPr wrap="square" lIns="0" tIns="0" rIns="0" bIns="0" anchor="ctr">
-            <a:spAutoFit/>
-          </a:bodyPr>
-          <a:lstStyle/>
-          <a:p>
-            <a:pPr algn="l">
-              <a:lnSpc>
-                <a:spcPts val="3420"/>
-              </a:lnSpc>
-            </a:pPr>
-            <a:r>
-              <a:rPr sz="2850" b="1" i="0" u="none">
-                <a:solidFill>
-                  <a:srgbClr val="0F172A"/>
-                </a:solidFill>
-                <a:latin typeface="Poppins"/>
-              </a:rPr>
-              <a:t>Estructura Modular del Proyecto Python</a:t>
-            </a:r>
-          </a:p>
-        </p:txBody>
-      </p:sp>
-      <p:sp>
-        <p:nvSpPr>
-          <p:cNvPr id="16" name="Rectangle 15"/>
+              <a:t> de RPA</a:t>
+            </a:r>
+            <a:endParaRPr sz="3900" b="1" i="0" u="none" dirty="0">
+              <a:solidFill>
+                <a:srgbClr val="0F172A"/>
+              </a:solidFill>
+              <a:latin typeface="Poppins"/>
+            </a:endParaRPr>
+          </a:p>
+        </p:txBody>
+      </p:sp>
+      <p:sp>
+        <p:nvSpPr>
+          <p:cNvPr id="5" name="Rectangle 4"/>
           <p:cNvSpPr/>
           <p:nvPr/>
         </p:nvSpPr>
         <p:spPr>
           <a:xfrm>
-            <a:off x="762000" y="571500"/>
-            <a:ext cx="57150" cy="434280"/>
+            <a:off x="5524500" y="2600325"/>
+            <a:ext cx="1143000" cy="38100"/>
           </a:xfrm>
           <a:prstGeom prst="rect">
             <a:avLst/>
@@ -6982,6 +7237,36 @@
           </a:p>
         </p:txBody>
       </p:sp>
+      <p:pic>
+        <p:nvPicPr>
+          <p:cNvPr id="8" name="Imagen 7">
+            <a:extLst>
+              <a:ext uri="{FF2B5EF4-FFF2-40B4-BE49-F238E27FC236}">
+                <a16:creationId xmlns:a16="http://schemas.microsoft.com/office/drawing/2014/main" id="{0728AD33-6A23-8FB2-503F-564E1F014656}"/>
+              </a:ext>
+            </a:extLst>
+          </p:cNvPr>
+          <p:cNvPicPr>
+            <a:picLocks noChangeAspect="1"/>
+          </p:cNvPicPr>
+          <p:nvPr/>
+        </p:nvPicPr>
+        <p:blipFill>
+          <a:blip r:embed="rId3"/>
+          <a:stretch>
+            <a:fillRect/>
+          </a:stretch>
+        </p:blipFill>
+        <p:spPr>
+          <a:xfrm>
+            <a:off x="2036234" y="1543050"/>
+            <a:ext cx="8119532" cy="4389622"/>
+          </a:xfrm>
+          <a:prstGeom prst="rect">
+            <a:avLst/>
+          </a:prstGeom>
+        </p:spPr>
+      </p:pic>
     </p:spTree>
   </p:cSld>
   <p:clrMapOvr>
@@ -7055,179 +7340,17 @@
         </p:blipFill>
         <p:spPr>
           <a:xfrm>
-            <a:off x="6286500" y="1950690"/>
-            <a:ext cx="5143500" cy="3619500"/>
+            <a:off x="762000" y="1234380"/>
+            <a:ext cx="3403550" cy="2362200"/>
           </a:xfrm>
           <a:prstGeom prst="rect">
             <a:avLst/>
           </a:prstGeom>
         </p:spPr>
       </p:pic>
-      <p:sp>
-        <p:nvSpPr>
-          <p:cNvPr id="4" name="TextBox 3"/>
-          <p:cNvSpPr txBox="1"/>
-          <p:nvPr/>
-        </p:nvSpPr>
-        <p:spPr>
-          <a:xfrm>
-            <a:off x="1104900" y="2309366"/>
-            <a:ext cx="4800600" cy="776882"/>
-          </a:xfrm>
-          <a:prstGeom prst="rect">
-            <a:avLst/>
-          </a:prstGeom>
-          <a:noFill/>
-        </p:spPr>
-        <p:txBody>
-          <a:bodyPr wrap="square" lIns="0" tIns="0" rIns="0" bIns="0" anchor="t">
-            <a:spAutoFit/>
-          </a:bodyPr>
-          <a:lstStyle/>
-          <a:p>
-            <a:pPr algn="l">
-              <a:lnSpc>
-                <a:spcPts val="2039"/>
-              </a:lnSpc>
-            </a:pPr>
-            <a:r>
-              <a:rPr sz="1275" b="0" i="0" u="none">
-                <a:solidFill>
-                  <a:srgbClr val="0F172A"/>
-                </a:solidFill>
-                <a:latin typeface="Inter SemiBold"/>
-              </a:rPr>
-              <a:t>Identificación del Comportamiento:</a:t>
-            </a:r>
-            <a:r>
-              <a:rPr sz="1275" b="0" i="0" u="none">
-                <a:solidFill>
-                  <a:srgbClr val="475569"/>
-                </a:solidFill>
-                <a:latin typeface="Inter"/>
-              </a:rPr>
-              <a:t> Se identificaron nulos legítimos provenientes de la fuente original en series de tiempo.</a:t>
-            </a:r>
-          </a:p>
-        </p:txBody>
-      </p:sp>
-      <p:sp>
-        <p:nvSpPr>
-          <p:cNvPr id="5" name="TextBox 4"/>
-          <p:cNvSpPr txBox="1"/>
-          <p:nvPr/>
-        </p:nvSpPr>
-        <p:spPr>
-          <a:xfrm>
-            <a:off x="1104900" y="3276748"/>
-            <a:ext cx="4800600" cy="776882"/>
-          </a:xfrm>
-          <a:prstGeom prst="rect">
-            <a:avLst/>
-          </a:prstGeom>
-          <a:noFill/>
-        </p:spPr>
-        <p:txBody>
-          <a:bodyPr wrap="square" lIns="0" tIns="0" rIns="0" bIns="0" anchor="t">
-            <a:spAutoFit/>
-          </a:bodyPr>
-          <a:lstStyle/>
-          <a:p>
-            <a:pPr algn="l">
-              <a:lnSpc>
-                <a:spcPts val="2039"/>
-              </a:lnSpc>
-            </a:pPr>
-            <a:r>
-              <a:rPr sz="1275" b="0" i="0" u="none">
-                <a:solidFill>
-                  <a:srgbClr val="0F172A"/>
-                </a:solidFill>
-                <a:latin typeface="Inter SemiBold"/>
-              </a:rPr>
-              <a:t>PIB Nominal e Real:</a:t>
-            </a:r>
-            <a:r>
-              <a:rPr sz="1275" b="0" i="0" u="none">
-                <a:solidFill>
-                  <a:srgbClr val="475569"/>
-                </a:solidFill>
-                <a:latin typeface="Inter"/>
-              </a:rPr>
-              <a:t> El primer año de la serie del PIB contiene un valor de tasa_variacion_anual nulo debido a la falta de año de comparación anterior.</a:t>
-            </a:r>
-          </a:p>
-        </p:txBody>
-      </p:sp>
-      <p:sp>
-        <p:nvSpPr>
-          <p:cNvPr id="6" name="TextBox 5"/>
-          <p:cNvSpPr txBox="1"/>
-          <p:nvPr/>
-        </p:nvSpPr>
-        <p:spPr>
-          <a:xfrm>
-            <a:off x="1104900" y="4244131"/>
-            <a:ext cx="4800600" cy="776882"/>
-          </a:xfrm>
-          <a:prstGeom prst="rect">
-            <a:avLst/>
-          </a:prstGeom>
-          <a:noFill/>
-        </p:spPr>
-        <p:txBody>
-          <a:bodyPr wrap="square" lIns="0" tIns="0" rIns="0" bIns="0" anchor="t">
-            <a:spAutoFit/>
-          </a:bodyPr>
-          <a:lstStyle/>
-          <a:p>
-            <a:pPr algn="l">
-              <a:lnSpc>
-                <a:spcPts val="2039"/>
-              </a:lnSpc>
-            </a:pPr>
-            <a:r>
-              <a:rPr sz="1275" b="0" i="0" u="none">
-                <a:solidFill>
-                  <a:srgbClr val="0F172A"/>
-                </a:solidFill>
-                <a:latin typeface="Inter SemiBold"/>
-              </a:rPr>
-              <a:t>Políticas Aplicadas:</a:t>
-            </a:r>
-            <a:r>
-              <a:rPr sz="1275" b="0" i="0" u="none">
-                <a:solidFill>
-                  <a:srgbClr val="475569"/>
-                </a:solidFill>
-                <a:latin typeface="Inter"/>
-              </a:rPr>
-              <a:t> Los nulos se preservan y documentan para Power BI. </a:t>
-            </a:r>
-            <a:r>
-              <a:rPr sz="1275" b="0" i="0" u="none">
-                <a:solidFill>
-                  <a:srgbClr val="0F172A"/>
-                </a:solidFill>
-                <a:latin typeface="Inter SemiBold"/>
-              </a:rPr>
-              <a:t>No se imputan, no se inventan, ni se eliminan</a:t>
-            </a:r>
-            <a:r>
-              <a:rPr sz="1275" b="0" i="0" u="none">
-                <a:solidFill>
-                  <a:srgbClr val="475569"/>
-                </a:solidFill>
-                <a:latin typeface="Inter"/>
-              </a:rPr>
-              <a:t> para evitar sesgar el análisis.</a:t>
-            </a:r>
-          </a:p>
-        </p:txBody>
-      </p:sp>
       <p:pic>
         <p:nvPicPr>
-          <p:cNvPr id="8" name="Picture 7" descr="image.png"/>
+          <p:cNvPr id="4" name="Picture 3" descr="image.png"/>
           <p:cNvPicPr>
             <a:picLocks noChangeAspect="1"/>
           </p:cNvPicPr>
@@ -7241,8 +7364,8 @@
         </p:blipFill>
         <p:spPr>
           <a:xfrm>
-            <a:off x="762000" y="2342703"/>
-            <a:ext cx="142875" cy="200025"/>
+            <a:off x="4394150" y="1234380"/>
+            <a:ext cx="3403550" cy="2362200"/>
           </a:xfrm>
           <a:prstGeom prst="rect">
             <a:avLst/>
@@ -7251,7 +7374,7 @@
       </p:pic>
       <p:pic>
         <p:nvPicPr>
-          <p:cNvPr id="9" name="Picture 8" descr="image.png"/>
+          <p:cNvPr id="5" name="Picture 4" descr="image.png"/>
           <p:cNvPicPr>
             <a:picLocks noChangeAspect="1"/>
           </p:cNvPicPr>
@@ -7265,17 +7388,278 @@
         </p:blipFill>
         <p:spPr>
           <a:xfrm>
-            <a:off x="762000" y="3310086"/>
-            <a:ext cx="190500" cy="200025"/>
+            <a:off x="8026300" y="1234380"/>
+            <a:ext cx="3403550" cy="2362200"/>
           </a:xfrm>
           <a:prstGeom prst="rect">
             <a:avLst/>
           </a:prstGeom>
         </p:spPr>
       </p:pic>
+      <p:sp>
+        <p:nvSpPr>
+          <p:cNvPr id="6" name="TextBox 5"/>
+          <p:cNvSpPr txBox="1"/>
+          <p:nvPr/>
+        </p:nvSpPr>
+        <p:spPr>
+          <a:xfrm>
+            <a:off x="1057275" y="2101155"/>
+            <a:ext cx="2953650" cy="285750"/>
+          </a:xfrm>
+          <a:prstGeom prst="rect">
+            <a:avLst/>
+          </a:prstGeom>
+          <a:noFill/>
+        </p:spPr>
+        <p:txBody>
+          <a:bodyPr wrap="square" lIns="0" tIns="0" rIns="0" bIns="0" anchor="t">
+            <a:spAutoFit/>
+          </a:bodyPr>
+          <a:lstStyle/>
+          <a:p>
+            <a:pPr algn="l"/>
+            <a:r>
+              <a:rPr sz="1500" b="1" i="0" u="none">
+                <a:solidFill>
+                  <a:srgbClr val="0F172A"/>
+                </a:solidFill>
+                <a:latin typeface="Poppins"/>
+              </a:rPr>
+              <a:t>Conexión &amp; Orquestación</a:t>
+            </a:r>
+          </a:p>
+        </p:txBody>
+      </p:sp>
+      <p:sp>
+        <p:nvSpPr>
+          <p:cNvPr id="7" name="TextBox 6"/>
+          <p:cNvSpPr txBox="1"/>
+          <p:nvPr/>
+        </p:nvSpPr>
+        <p:spPr>
+          <a:xfrm>
+            <a:off x="1057275" y="2501205"/>
+            <a:ext cx="2813000" cy="800100"/>
+          </a:xfrm>
+          <a:prstGeom prst="rect">
+            <a:avLst/>
+          </a:prstGeom>
+          <a:noFill/>
+        </p:spPr>
+        <p:txBody>
+          <a:bodyPr wrap="square" lIns="0" tIns="0" rIns="0" bIns="0" anchor="t">
+            <a:spAutoFit/>
+          </a:bodyPr>
+          <a:lstStyle/>
+          <a:p>
+            <a:pPr algn="l">
+              <a:lnSpc>
+                <a:spcPts val="1575"/>
+              </a:lnSpc>
+            </a:pPr>
+            <a:r>
+              <a:rPr sz="1050" b="0" i="0" u="none">
+                <a:solidFill>
+                  <a:srgbClr val="0F172A"/>
+                </a:solidFill>
+                <a:latin typeface="Inter SemiBold"/>
+              </a:rPr>
+              <a:t>db.py &amp; load.py:</a:t>
+            </a:r>
+            <a:r>
+              <a:t>
+</a:t>
+            </a:r>
+            <a:r>
+              <a:rPr sz="1050" b="0" i="0" u="none">
+                <a:solidFill>
+                  <a:srgbClr val="64748B"/>
+                </a:solidFill>
+                <a:latin typeface="Inter"/>
+              </a:rPr>
+              <a:t> Administración de la conexión a Oracle en modo Thin. Orquesta la extracción, limpia tablas, inserta por lotes y recrea vistas.</a:t>
+            </a:r>
+          </a:p>
+        </p:txBody>
+      </p:sp>
+      <p:sp>
+        <p:nvSpPr>
+          <p:cNvPr id="8" name="TextBox 7"/>
+          <p:cNvSpPr txBox="1"/>
+          <p:nvPr/>
+        </p:nvSpPr>
+        <p:spPr>
+          <a:xfrm>
+            <a:off x="4689425" y="2101155"/>
+            <a:ext cx="2953650" cy="285750"/>
+          </a:xfrm>
+          <a:prstGeom prst="rect">
+            <a:avLst/>
+          </a:prstGeom>
+          <a:noFill/>
+        </p:spPr>
+        <p:txBody>
+          <a:bodyPr wrap="square" lIns="0" tIns="0" rIns="0" bIns="0" anchor="t">
+            <a:spAutoFit/>
+          </a:bodyPr>
+          <a:lstStyle/>
+          <a:p>
+            <a:pPr algn="l"/>
+            <a:r>
+              <a:rPr sz="1500" b="1" i="0" u="none">
+                <a:solidFill>
+                  <a:srgbClr val="0F172A"/>
+                </a:solidFill>
+                <a:latin typeface="Poppins"/>
+              </a:rPr>
+              <a:t>Módulos de Limpieza</a:t>
+            </a:r>
+          </a:p>
+        </p:txBody>
+      </p:sp>
+      <p:sp>
+        <p:nvSpPr>
+          <p:cNvPr id="9" name="TextBox 8"/>
+          <p:cNvSpPr txBox="1"/>
+          <p:nvPr/>
+        </p:nvSpPr>
+        <p:spPr>
+          <a:xfrm>
+            <a:off x="4689425" y="2501205"/>
+            <a:ext cx="2813000" cy="800100"/>
+          </a:xfrm>
+          <a:prstGeom prst="rect">
+            <a:avLst/>
+          </a:prstGeom>
+          <a:noFill/>
+        </p:spPr>
+        <p:txBody>
+          <a:bodyPr wrap="square" lIns="0" tIns="0" rIns="0" bIns="0" anchor="t">
+            <a:spAutoFit/>
+          </a:bodyPr>
+          <a:lstStyle/>
+          <a:p>
+            <a:pPr algn="l">
+              <a:lnSpc>
+                <a:spcPts val="1575"/>
+              </a:lnSpc>
+            </a:pPr>
+            <a:r>
+              <a:rPr sz="1050" b="0" i="0" u="none">
+                <a:solidFill>
+                  <a:srgbClr val="0F172A"/>
+                </a:solidFill>
+                <a:latin typeface="Inter SemiBold"/>
+              </a:rPr>
+              <a:t>transform/ (*.py):</a:t>
+            </a:r>
+            <a:r>
+              <a:t>
+</a:t>
+            </a:r>
+            <a:r>
+              <a:rPr sz="1050" b="0" i="0" u="none">
+                <a:solidFill>
+                  <a:srgbClr val="64748B"/>
+                </a:solidFill>
+                <a:latin typeface="Inter"/>
+              </a:rPr>
+              <a:t> Limpieza específica por dominio: BCE (PIB, petróleo), Censo (empleo), Mineduc (colegios) y Supercias (empresas).</a:t>
+            </a:r>
+          </a:p>
+        </p:txBody>
+      </p:sp>
+      <p:sp>
+        <p:nvSpPr>
+          <p:cNvPr id="10" name="TextBox 9"/>
+          <p:cNvSpPr txBox="1"/>
+          <p:nvPr/>
+        </p:nvSpPr>
+        <p:spPr>
+          <a:xfrm>
+            <a:off x="8321575" y="2101155"/>
+            <a:ext cx="2953650" cy="285750"/>
+          </a:xfrm>
+          <a:prstGeom prst="rect">
+            <a:avLst/>
+          </a:prstGeom>
+          <a:noFill/>
+        </p:spPr>
+        <p:txBody>
+          <a:bodyPr wrap="square" lIns="0" tIns="0" rIns="0" bIns="0" anchor="t">
+            <a:spAutoFit/>
+          </a:bodyPr>
+          <a:lstStyle/>
+          <a:p>
+            <a:pPr algn="l"/>
+            <a:r>
+              <a:rPr sz="1500" b="1" i="0" u="none">
+                <a:solidFill>
+                  <a:srgbClr val="0F172A"/>
+                </a:solidFill>
+                <a:latin typeface="Poppins"/>
+              </a:rPr>
+              <a:t>Modelado Relacional</a:t>
+            </a:r>
+          </a:p>
+        </p:txBody>
+      </p:sp>
+      <p:sp>
+        <p:nvSpPr>
+          <p:cNvPr id="11" name="TextBox 10"/>
+          <p:cNvSpPr txBox="1"/>
+          <p:nvPr/>
+        </p:nvSpPr>
+        <p:spPr>
+          <a:xfrm>
+            <a:off x="8321575" y="2501205"/>
+            <a:ext cx="2813000" cy="800100"/>
+          </a:xfrm>
+          <a:prstGeom prst="rect">
+            <a:avLst/>
+          </a:prstGeom>
+          <a:noFill/>
+        </p:spPr>
+        <p:txBody>
+          <a:bodyPr wrap="square" lIns="0" tIns="0" rIns="0" bIns="0" anchor="t">
+            <a:spAutoFit/>
+          </a:bodyPr>
+          <a:lstStyle/>
+          <a:p>
+            <a:pPr algn="l">
+              <a:lnSpc>
+                <a:spcPts val="1575"/>
+              </a:lnSpc>
+            </a:pPr>
+            <a:r>
+              <a:rPr sz="1050" b="0" i="0" u="none">
+                <a:solidFill>
+                  <a:srgbClr val="0F172A"/>
+                </a:solidFill>
+                <a:latin typeface="Inter SemiBold"/>
+              </a:rPr>
+              <a:t>sql/gold_views.sql:</a:t>
+            </a:r>
+            <a:r>
+              <a:t>
+</a:t>
+            </a:r>
+            <a:r>
+              <a:rPr sz="1050" b="0" i="0" u="none">
+                <a:solidFill>
+                  <a:srgbClr val="64748B"/>
+                </a:solidFill>
+                <a:latin typeface="Inter"/>
+              </a:rPr>
+              <a:t> Definiciones SQL nativas para generar las vistas agregadas y de negocio de la capa Gold.</a:t>
+            </a:r>
+          </a:p>
+        </p:txBody>
+      </p:sp>
       <p:pic>
         <p:nvPicPr>
-          <p:cNvPr id="10" name="Picture 9" descr="image.png"/>
+          <p:cNvPr id="12" name="Picture 11" descr="image.png"/>
           <p:cNvPicPr>
             <a:picLocks noChangeAspect="1"/>
           </p:cNvPicPr>
@@ -7289,17 +7673,65 @@
         </p:blipFill>
         <p:spPr>
           <a:xfrm>
-            <a:off x="762000" y="4277469"/>
-            <a:ext cx="190500" cy="200025"/>
+            <a:off x="1057275" y="1567755"/>
+            <a:ext cx="257175" cy="342900"/>
           </a:xfrm>
           <a:prstGeom prst="rect">
             <a:avLst/>
           </a:prstGeom>
         </p:spPr>
       </p:pic>
-      <p:sp>
-        <p:nvSpPr>
-          <p:cNvPr id="11" name="TextBox 10"/>
+      <p:pic>
+        <p:nvPicPr>
+          <p:cNvPr id="13" name="Picture 12" descr="image.png"/>
+          <p:cNvPicPr>
+            <a:picLocks noChangeAspect="1"/>
+          </p:cNvPicPr>
+          <p:nvPr/>
+        </p:nvPicPr>
+        <p:blipFill>
+          <a:blip r:embed="rId7"/>
+          <a:stretch>
+            <a:fillRect/>
+          </a:stretch>
+        </p:blipFill>
+        <p:spPr>
+          <a:xfrm>
+            <a:off x="4689425" y="1567755"/>
+            <a:ext cx="342900" cy="342900"/>
+          </a:xfrm>
+          <a:prstGeom prst="rect">
+            <a:avLst/>
+          </a:prstGeom>
+        </p:spPr>
+      </p:pic>
+      <p:pic>
+        <p:nvPicPr>
+          <p:cNvPr id="14" name="Picture 13" descr="image.png"/>
+          <p:cNvPicPr>
+            <a:picLocks noChangeAspect="1"/>
+          </p:cNvPicPr>
+          <p:nvPr/>
+        </p:nvPicPr>
+        <p:blipFill>
+          <a:blip r:embed="rId8"/>
+          <a:stretch>
+            <a:fillRect/>
+          </a:stretch>
+        </p:blipFill>
+        <p:spPr>
+          <a:xfrm>
+            <a:off x="8321575" y="1567755"/>
+            <a:ext cx="304800" cy="342900"/>
+          </a:xfrm>
+          <a:prstGeom prst="rect">
+            <a:avLst/>
+          </a:prstGeom>
+        </p:spPr>
+      </p:pic>
+      <p:sp>
+        <p:nvSpPr>
+          <p:cNvPr id="15" name="TextBox 14"/>
           <p:cNvSpPr txBox="1"/>
           <p:nvPr/>
         </p:nvSpPr>
@@ -7331,14 +7763,14 @@
                 </a:solidFill>
                 <a:latin typeface="Poppins"/>
               </a:rPr>
-              <a:t>Regla 1: Gestión de Nulos Reales</a:t>
-            </a:r>
-          </a:p>
-        </p:txBody>
-      </p:sp>
-      <p:sp>
-        <p:nvSpPr>
-          <p:cNvPr id="12" name="Rectangle 11"/>
+              <a:t>Estructura Modular del Proyecto Python</a:t>
+            </a:r>
+          </a:p>
+        </p:txBody>
+      </p:sp>
+      <p:sp>
+        <p:nvSpPr>
+          <p:cNvPr id="16" name="Rectangle 15"/>
           <p:cNvSpPr/>
           <p:nvPr/>
         </p:nvSpPr>
@@ -7454,17 +7886,179 @@
         </p:blipFill>
         <p:spPr>
           <a:xfrm>
-            <a:off x="762000" y="2574577"/>
-            <a:ext cx="3403550" cy="2371725"/>
+            <a:off x="6286500" y="1950690"/>
+            <a:ext cx="5143500" cy="3619500"/>
           </a:xfrm>
           <a:prstGeom prst="rect">
             <a:avLst/>
           </a:prstGeom>
         </p:spPr>
       </p:pic>
+      <p:sp>
+        <p:nvSpPr>
+          <p:cNvPr id="4" name="TextBox 3"/>
+          <p:cNvSpPr txBox="1"/>
+          <p:nvPr/>
+        </p:nvSpPr>
+        <p:spPr>
+          <a:xfrm>
+            <a:off x="1104900" y="2309366"/>
+            <a:ext cx="4800600" cy="776882"/>
+          </a:xfrm>
+          <a:prstGeom prst="rect">
+            <a:avLst/>
+          </a:prstGeom>
+          <a:noFill/>
+        </p:spPr>
+        <p:txBody>
+          <a:bodyPr wrap="square" lIns="0" tIns="0" rIns="0" bIns="0" anchor="t">
+            <a:spAutoFit/>
+          </a:bodyPr>
+          <a:lstStyle/>
+          <a:p>
+            <a:pPr algn="l">
+              <a:lnSpc>
+                <a:spcPts val="2039"/>
+              </a:lnSpc>
+            </a:pPr>
+            <a:r>
+              <a:rPr sz="1275" b="0" i="0" u="none">
+                <a:solidFill>
+                  <a:srgbClr val="0F172A"/>
+                </a:solidFill>
+                <a:latin typeface="Inter SemiBold"/>
+              </a:rPr>
+              <a:t>Identificación del Comportamiento:</a:t>
+            </a:r>
+            <a:r>
+              <a:rPr sz="1275" b="0" i="0" u="none">
+                <a:solidFill>
+                  <a:srgbClr val="475569"/>
+                </a:solidFill>
+                <a:latin typeface="Inter"/>
+              </a:rPr>
+              <a:t> Se identificaron nulos legítimos provenientes de la fuente original en series de tiempo.</a:t>
+            </a:r>
+          </a:p>
+        </p:txBody>
+      </p:sp>
+      <p:sp>
+        <p:nvSpPr>
+          <p:cNvPr id="5" name="TextBox 4"/>
+          <p:cNvSpPr txBox="1"/>
+          <p:nvPr/>
+        </p:nvSpPr>
+        <p:spPr>
+          <a:xfrm>
+            <a:off x="1104900" y="3276748"/>
+            <a:ext cx="4800600" cy="776882"/>
+          </a:xfrm>
+          <a:prstGeom prst="rect">
+            <a:avLst/>
+          </a:prstGeom>
+          <a:noFill/>
+        </p:spPr>
+        <p:txBody>
+          <a:bodyPr wrap="square" lIns="0" tIns="0" rIns="0" bIns="0" anchor="t">
+            <a:spAutoFit/>
+          </a:bodyPr>
+          <a:lstStyle/>
+          <a:p>
+            <a:pPr algn="l">
+              <a:lnSpc>
+                <a:spcPts val="2039"/>
+              </a:lnSpc>
+            </a:pPr>
+            <a:r>
+              <a:rPr sz="1275" b="0" i="0" u="none">
+                <a:solidFill>
+                  <a:srgbClr val="0F172A"/>
+                </a:solidFill>
+                <a:latin typeface="Inter SemiBold"/>
+              </a:rPr>
+              <a:t>PIB Nominal e Real:</a:t>
+            </a:r>
+            <a:r>
+              <a:rPr sz="1275" b="0" i="0" u="none">
+                <a:solidFill>
+                  <a:srgbClr val="475569"/>
+                </a:solidFill>
+                <a:latin typeface="Inter"/>
+              </a:rPr>
+              <a:t> El primer año de la serie del PIB contiene un valor de tasa_variacion_anual nulo debido a la falta de año de comparación anterior.</a:t>
+            </a:r>
+          </a:p>
+        </p:txBody>
+      </p:sp>
+      <p:sp>
+        <p:nvSpPr>
+          <p:cNvPr id="6" name="TextBox 5"/>
+          <p:cNvSpPr txBox="1"/>
+          <p:nvPr/>
+        </p:nvSpPr>
+        <p:spPr>
+          <a:xfrm>
+            <a:off x="1104900" y="4244131"/>
+            <a:ext cx="4800600" cy="776882"/>
+          </a:xfrm>
+          <a:prstGeom prst="rect">
+            <a:avLst/>
+          </a:prstGeom>
+          <a:noFill/>
+        </p:spPr>
+        <p:txBody>
+          <a:bodyPr wrap="square" lIns="0" tIns="0" rIns="0" bIns="0" anchor="t">
+            <a:spAutoFit/>
+          </a:bodyPr>
+          <a:lstStyle/>
+          <a:p>
+            <a:pPr algn="l">
+              <a:lnSpc>
+                <a:spcPts val="2039"/>
+              </a:lnSpc>
+            </a:pPr>
+            <a:r>
+              <a:rPr sz="1275" b="0" i="0" u="none">
+                <a:solidFill>
+                  <a:srgbClr val="0F172A"/>
+                </a:solidFill>
+                <a:latin typeface="Inter SemiBold"/>
+              </a:rPr>
+              <a:t>Políticas Aplicadas:</a:t>
+            </a:r>
+            <a:r>
+              <a:rPr sz="1275" b="0" i="0" u="none">
+                <a:solidFill>
+                  <a:srgbClr val="475569"/>
+                </a:solidFill>
+                <a:latin typeface="Inter"/>
+              </a:rPr>
+              <a:t> Los nulos se preservan y documentan para Power BI. </a:t>
+            </a:r>
+            <a:r>
+              <a:rPr sz="1275" b="0" i="0" u="none">
+                <a:solidFill>
+                  <a:srgbClr val="0F172A"/>
+                </a:solidFill>
+                <a:latin typeface="Inter SemiBold"/>
+              </a:rPr>
+              <a:t>No se imputan, no se inventan, ni se eliminan</a:t>
+            </a:r>
+            <a:r>
+              <a:rPr sz="1275" b="0" i="0" u="none">
+                <a:solidFill>
+                  <a:srgbClr val="475569"/>
+                </a:solidFill>
+                <a:latin typeface="Inter"/>
+              </a:rPr>
+              <a:t> para evitar sesgar el análisis.</a:t>
+            </a:r>
+          </a:p>
+        </p:txBody>
+      </p:sp>
       <p:pic>
         <p:nvPicPr>
-          <p:cNvPr id="4" name="Picture 3" descr="image.png"/>
+          <p:cNvPr id="8" name="Picture 7" descr="image.png"/>
           <p:cNvPicPr>
             <a:picLocks noChangeAspect="1"/>
           </p:cNvPicPr>
@@ -7478,8 +8072,8 @@
         </p:blipFill>
         <p:spPr>
           <a:xfrm>
-            <a:off x="4394150" y="2574577"/>
-            <a:ext cx="3403550" cy="2371725"/>
+            <a:off x="762000" y="2342703"/>
+            <a:ext cx="142875" cy="200025"/>
           </a:xfrm>
           <a:prstGeom prst="rect">
             <a:avLst/>
@@ -7488,7 +8082,7 @@
       </p:pic>
       <p:pic>
         <p:nvPicPr>
-          <p:cNvPr id="5" name="Picture 4" descr="image.png"/>
+          <p:cNvPr id="9" name="Picture 8" descr="image.png"/>
           <p:cNvPicPr>
             <a:picLocks noChangeAspect="1"/>
           </p:cNvPicPr>
@@ -7502,239 +8096,17 @@
         </p:blipFill>
         <p:spPr>
           <a:xfrm>
-            <a:off x="8026300" y="2574577"/>
-            <a:ext cx="3403550" cy="2371725"/>
+            <a:off x="762000" y="3310086"/>
+            <a:ext cx="190500" cy="200025"/>
           </a:xfrm>
           <a:prstGeom prst="rect">
             <a:avLst/>
           </a:prstGeom>
         </p:spPr>
       </p:pic>
-      <p:sp>
-        <p:nvSpPr>
-          <p:cNvPr id="6" name="TextBox 5"/>
-          <p:cNvSpPr txBox="1"/>
-          <p:nvPr/>
-        </p:nvSpPr>
-        <p:spPr>
-          <a:xfrm>
-            <a:off x="1057275" y="3441352"/>
-            <a:ext cx="2953650" cy="285750"/>
-          </a:xfrm>
-          <a:prstGeom prst="rect">
-            <a:avLst/>
-          </a:prstGeom>
-          <a:noFill/>
-        </p:spPr>
-        <p:txBody>
-          <a:bodyPr wrap="square" lIns="0" tIns="0" rIns="0" bIns="0" anchor="t">
-            <a:spAutoFit/>
-          </a:bodyPr>
-          <a:lstStyle/>
-          <a:p>
-            <a:pPr algn="l"/>
-            <a:r>
-              <a:rPr sz="1500" b="1" i="0" u="none">
-                <a:solidFill>
-                  <a:srgbClr val="0F172A"/>
-                </a:solidFill>
-                <a:latin typeface="Poppins"/>
-              </a:rPr>
-              <a:t>Llaves Naturales</a:t>
-            </a:r>
-          </a:p>
-        </p:txBody>
-      </p:sp>
-      <p:sp>
-        <p:nvSpPr>
-          <p:cNvPr id="7" name="TextBox 6"/>
-          <p:cNvSpPr txBox="1"/>
-          <p:nvPr/>
-        </p:nvSpPr>
-        <p:spPr>
-          <a:xfrm>
-            <a:off x="1057275" y="3841402"/>
-            <a:ext cx="2813000" cy="800100"/>
-          </a:xfrm>
-          <a:prstGeom prst="rect">
-            <a:avLst/>
-          </a:prstGeom>
-          <a:noFill/>
-        </p:spPr>
-        <p:txBody>
-          <a:bodyPr wrap="square" lIns="0" tIns="0" rIns="0" bIns="0" anchor="t">
-            <a:spAutoFit/>
-          </a:bodyPr>
-          <a:lstStyle/>
-          <a:p>
-            <a:pPr algn="l">
-              <a:lnSpc>
-                <a:spcPts val="1575"/>
-              </a:lnSpc>
-            </a:pPr>
-            <a:r>
-              <a:rPr sz="1050" b="0" i="0" u="none">
-                <a:solidFill>
-                  <a:srgbClr val="64748B"/>
-                </a:solidFill>
-                <a:latin typeface="Inter"/>
-              </a:rPr>
-              <a:t>Uso estricto de claves naturales para evaluar duplicidad: Fecha para series temporales, RUC para empresas, Expediente + Año para el ranking corporativo.</a:t>
-            </a:r>
-          </a:p>
-        </p:txBody>
-      </p:sp>
-      <p:sp>
-        <p:nvSpPr>
-          <p:cNvPr id="8" name="TextBox 7"/>
-          <p:cNvSpPr txBox="1"/>
-          <p:nvPr/>
-        </p:nvSpPr>
-        <p:spPr>
-          <a:xfrm>
-            <a:off x="4689425" y="3441352"/>
-            <a:ext cx="2953650" cy="285750"/>
-          </a:xfrm>
-          <a:prstGeom prst="rect">
-            <a:avLst/>
-          </a:prstGeom>
-          <a:noFill/>
-        </p:spPr>
-        <p:txBody>
-          <a:bodyPr wrap="square" lIns="0" tIns="0" rIns="0" bIns="0" anchor="t">
-            <a:spAutoFit/>
-          </a:bodyPr>
-          <a:lstStyle/>
-          <a:p>
-            <a:pPr algn="l"/>
-            <a:r>
-              <a:rPr sz="1500" b="1" i="0" u="none">
-                <a:solidFill>
-                  <a:srgbClr val="0F172A"/>
-                </a:solidFill>
-                <a:latin typeface="Poppins"/>
-              </a:rPr>
-              <a:t>Módulo Común</a:t>
-            </a:r>
-          </a:p>
-        </p:txBody>
-      </p:sp>
-      <p:sp>
-        <p:nvSpPr>
-          <p:cNvPr id="9" name="TextBox 8"/>
-          <p:cNvSpPr txBox="1"/>
-          <p:nvPr/>
-        </p:nvSpPr>
-        <p:spPr>
-          <a:xfrm>
-            <a:off x="4689425" y="3841402"/>
-            <a:ext cx="2813000" cy="809625"/>
-          </a:xfrm>
-          <a:prstGeom prst="rect">
-            <a:avLst/>
-          </a:prstGeom>
-          <a:noFill/>
-        </p:spPr>
-        <p:txBody>
-          <a:bodyPr wrap="square" lIns="0" tIns="0" rIns="0" bIns="0" anchor="t">
-            <a:spAutoFit/>
-          </a:bodyPr>
-          <a:lstStyle/>
-          <a:p>
-            <a:pPr algn="l">
-              <a:lnSpc>
-                <a:spcPts val="1575"/>
-              </a:lnSpc>
-            </a:pPr>
-            <a:r>
-              <a:rPr sz="1050" b="0" i="0" u="none">
-                <a:solidFill>
-                  <a:srgbClr val="64748B"/>
-                </a:solidFill>
-                <a:latin typeface="Inter"/>
-              </a:rPr>
-              <a:t>Implementación de la función centralizada drop_duplicates_report() que audita y reporta los registros repetidos eliminados en tiempo de ejecución.</a:t>
-            </a:r>
-          </a:p>
-        </p:txBody>
-      </p:sp>
-      <p:sp>
-        <p:nvSpPr>
-          <p:cNvPr id="10" name="TextBox 9"/>
-          <p:cNvSpPr txBox="1"/>
-          <p:nvPr/>
-        </p:nvSpPr>
-        <p:spPr>
-          <a:xfrm>
-            <a:off x="8321575" y="3441352"/>
-            <a:ext cx="2953650" cy="285750"/>
-          </a:xfrm>
-          <a:prstGeom prst="rect">
-            <a:avLst/>
-          </a:prstGeom>
-          <a:noFill/>
-        </p:spPr>
-        <p:txBody>
-          <a:bodyPr wrap="square" lIns="0" tIns="0" rIns="0" bIns="0" anchor="t">
-            <a:spAutoFit/>
-          </a:bodyPr>
-          <a:lstStyle/>
-          <a:p>
-            <a:pPr algn="l"/>
-            <a:r>
-              <a:rPr sz="1500" b="1" i="0" u="none">
-                <a:solidFill>
-                  <a:srgbClr val="0F172A"/>
-                </a:solidFill>
-                <a:latin typeface="Poppins"/>
-              </a:rPr>
-              <a:t>Integridad Referencial</a:t>
-            </a:r>
-          </a:p>
-        </p:txBody>
-      </p:sp>
-      <p:sp>
-        <p:nvSpPr>
-          <p:cNvPr id="11" name="TextBox 10"/>
-          <p:cNvSpPr txBox="1"/>
-          <p:nvPr/>
-        </p:nvSpPr>
-        <p:spPr>
-          <a:xfrm>
-            <a:off x="8321575" y="3841402"/>
-            <a:ext cx="2813000" cy="800100"/>
-          </a:xfrm>
-          <a:prstGeom prst="rect">
-            <a:avLst/>
-          </a:prstGeom>
-          <a:noFill/>
-        </p:spPr>
-        <p:txBody>
-          <a:bodyPr wrap="square" lIns="0" tIns="0" rIns="0" bIns="0" anchor="t">
-            <a:spAutoFit/>
-          </a:bodyPr>
-          <a:lstStyle/>
-          <a:p>
-            <a:pPr algn="l">
-              <a:lnSpc>
-                <a:spcPts val="1575"/>
-              </a:lnSpc>
-            </a:pPr>
-            <a:r>
-              <a:rPr sz="1050" b="0" i="0" u="none">
-                <a:solidFill>
-                  <a:srgbClr val="64748B"/>
-                </a:solidFill>
-                <a:latin typeface="Inter"/>
-              </a:rPr>
-              <a:t>Asegura que cada tabla Silver conserve una única fila representativa por entidad, evitando la duplicación de métricas financieras y demográficas.</a:t>
-            </a:r>
-          </a:p>
-        </p:txBody>
-      </p:sp>
       <p:pic>
         <p:nvPicPr>
-          <p:cNvPr id="12" name="Picture 11" descr="image.png"/>
+          <p:cNvPr id="10" name="Picture 9" descr="image.png"/>
           <p:cNvPicPr>
             <a:picLocks noChangeAspect="1"/>
           </p:cNvPicPr>
@@ -7748,65 +8120,17 @@
         </p:blipFill>
         <p:spPr>
           <a:xfrm>
-            <a:off x="1057275" y="2907952"/>
-            <a:ext cx="342900" cy="342900"/>
+            <a:off x="762000" y="4277469"/>
+            <a:ext cx="190500" cy="200025"/>
           </a:xfrm>
           <a:prstGeom prst="rect">
             <a:avLst/>
           </a:prstGeom>
         </p:spPr>
       </p:pic>
-      <p:pic>
-        <p:nvPicPr>
-          <p:cNvPr id="13" name="Picture 12" descr="image.png"/>
-          <p:cNvPicPr>
-            <a:picLocks noChangeAspect="1"/>
-          </p:cNvPicPr>
-          <p:nvPr/>
-        </p:nvPicPr>
-        <p:blipFill>
-          <a:blip r:embed="rId7"/>
-          <a:stretch>
-            <a:fillRect/>
-          </a:stretch>
-        </p:blipFill>
-        <p:spPr>
-          <a:xfrm>
-            <a:off x="4689425" y="2907952"/>
-            <a:ext cx="390525" cy="342900"/>
-          </a:xfrm>
-          <a:prstGeom prst="rect">
-            <a:avLst/>
-          </a:prstGeom>
-        </p:spPr>
-      </p:pic>
-      <p:pic>
-        <p:nvPicPr>
-          <p:cNvPr id="14" name="Picture 13" descr="image.png"/>
-          <p:cNvPicPr>
-            <a:picLocks noChangeAspect="1"/>
-          </p:cNvPicPr>
-          <p:nvPr/>
-        </p:nvPicPr>
-        <p:blipFill>
-          <a:blip r:embed="rId8"/>
-          <a:stretch>
-            <a:fillRect/>
-          </a:stretch>
-        </p:blipFill>
-        <p:spPr>
-          <a:xfrm>
-            <a:off x="8321575" y="2907952"/>
-            <a:ext cx="304800" cy="342900"/>
-          </a:xfrm>
-          <a:prstGeom prst="rect">
-            <a:avLst/>
-          </a:prstGeom>
-        </p:spPr>
-      </p:pic>
-      <p:sp>
-        <p:nvSpPr>
-          <p:cNvPr id="15" name="TextBox 14"/>
+      <p:sp>
+        <p:nvSpPr>
+          <p:cNvPr id="11" name="TextBox 10"/>
           <p:cNvSpPr txBox="1"/>
           <p:nvPr/>
         </p:nvSpPr>
@@ -7838,14 +8162,14 @@
                 </a:solidFill>
                 <a:latin typeface="Poppins"/>
               </a:rPr>
-              <a:t>Regla 2: Eliminación Estratégica de Duplicados</a:t>
-            </a:r>
-          </a:p>
-        </p:txBody>
-      </p:sp>
-      <p:sp>
-        <p:nvSpPr>
-          <p:cNvPr id="16" name="Rectangle 15"/>
+              <a:t>Regla 1: Gestión de Nulos Reales</a:t>
+            </a:r>
+          </a:p>
+        </p:txBody>
+      </p:sp>
+      <p:sp>
+        <p:nvSpPr>
+          <p:cNvPr id="12" name="Rectangle 11"/>
           <p:cNvSpPr/>
           <p:nvPr/>
         </p:nvSpPr>
@@ -7945,153 +8269,9 @@
           </a:prstGeom>
         </p:spPr>
       </p:pic>
-      <p:sp>
-        <p:nvSpPr>
-          <p:cNvPr id="3" name="TextBox 2"/>
-          <p:cNvSpPr txBox="1"/>
-          <p:nvPr/>
-        </p:nvSpPr>
-        <p:spPr>
-          <a:xfrm>
-            <a:off x="1676400" y="2697807"/>
-            <a:ext cx="9182100" cy="517921"/>
-          </a:xfrm>
-          <a:prstGeom prst="rect">
-            <a:avLst/>
-          </a:prstGeom>
-          <a:noFill/>
-        </p:spPr>
-        <p:txBody>
-          <a:bodyPr wrap="square" lIns="0" tIns="0" rIns="0" bIns="0" anchor="t">
-            <a:spAutoFit/>
-          </a:bodyPr>
-          <a:lstStyle/>
-          <a:p>
-            <a:pPr algn="l">
-              <a:lnSpc>
-                <a:spcPts val="2039"/>
-              </a:lnSpc>
-            </a:pPr>
-            <a:r>
-              <a:rPr sz="1275" b="0" i="0" u="none">
-                <a:solidFill>
-                  <a:srgbClr val="0F172A"/>
-                </a:solidFill>
-                <a:latin typeface="Inter SemiBold"/>
-              </a:rPr>
-              <a:t>Fechas Uniformes:</a:t>
-            </a:r>
-            <a:r>
-              <a:rPr sz="1275" b="0" i="0" u="none">
-                <a:solidFill>
-                  <a:srgbClr val="475569"/>
-                </a:solidFill>
-                <a:latin typeface="Inter"/>
-              </a:rPr>
-              <a:t> Conversión estricta de cadenas de texto y formatos variados a formato estándar ISO AAAA-MM-DD mediante pd.to_datetime().</a:t>
-            </a:r>
-          </a:p>
-        </p:txBody>
-      </p:sp>
-      <p:sp>
-        <p:nvSpPr>
-          <p:cNvPr id="4" name="TextBox 3"/>
-          <p:cNvSpPr txBox="1"/>
-          <p:nvPr/>
-        </p:nvSpPr>
-        <p:spPr>
-          <a:xfrm>
-            <a:off x="1676400" y="3406229"/>
-            <a:ext cx="9182100" cy="517921"/>
-          </a:xfrm>
-          <a:prstGeom prst="rect">
-            <a:avLst/>
-          </a:prstGeom>
-          <a:noFill/>
-        </p:spPr>
-        <p:txBody>
-          <a:bodyPr wrap="square" lIns="0" tIns="0" rIns="0" bIns="0" anchor="t">
-            <a:spAutoFit/>
-          </a:bodyPr>
-          <a:lstStyle/>
-          <a:p>
-            <a:pPr algn="l">
-              <a:lnSpc>
-                <a:spcPts val="2039"/>
-              </a:lnSpc>
-            </a:pPr>
-            <a:r>
-              <a:rPr sz="1275" b="0" i="0" u="none">
-                <a:solidFill>
-                  <a:srgbClr val="0F172A"/>
-                </a:solidFill>
-                <a:latin typeface="Inter SemiBold"/>
-              </a:rPr>
-              <a:t>Coerción Numérica Segura:</a:t>
-            </a:r>
-            <a:r>
-              <a:rPr sz="1275" b="0" i="0" u="none">
-                <a:solidFill>
-                  <a:srgbClr val="475569"/>
-                </a:solidFill>
-                <a:latin typeface="Inter"/>
-              </a:rPr>
-              <a:t> Implementación de la función personalizada to_numeric_safe() que fuerza valores erróneos, strings vacíos o caracteres inválidos a nulos lógicos (Float/Int).</a:t>
-            </a:r>
-          </a:p>
-        </p:txBody>
-      </p:sp>
-      <p:sp>
-        <p:nvSpPr>
-          <p:cNvPr id="5" name="TextBox 4"/>
-          <p:cNvSpPr txBox="1"/>
-          <p:nvPr/>
-        </p:nvSpPr>
-        <p:spPr>
-          <a:xfrm>
-            <a:off x="1676400" y="4114651"/>
-            <a:ext cx="9182100" cy="517921"/>
-          </a:xfrm>
-          <a:prstGeom prst="rect">
-            <a:avLst/>
-          </a:prstGeom>
-          <a:noFill/>
-        </p:spPr>
-        <p:txBody>
-          <a:bodyPr wrap="square" lIns="0" tIns="0" rIns="0" bIns="0" anchor="t">
-            <a:spAutoFit/>
-          </a:bodyPr>
-          <a:lstStyle/>
-          <a:p>
-            <a:pPr algn="l">
-              <a:lnSpc>
-                <a:spcPts val="2039"/>
-              </a:lnSpc>
-            </a:pPr>
-            <a:r>
-              <a:rPr sz="1275" b="0" i="0" u="none">
-                <a:solidFill>
-                  <a:srgbClr val="0F172A"/>
-                </a:solidFill>
-                <a:latin typeface="Inter SemiBold"/>
-              </a:rPr>
-              <a:t>Normalización de Texto:</a:t>
-            </a:r>
-            <a:r>
-              <a:rPr sz="1275" b="0" i="0" u="none">
-                <a:solidFill>
-                  <a:srgbClr val="475569"/>
-                </a:solidFill>
-                <a:latin typeface="Inter"/>
-              </a:rPr>
-              <a:t> Aplicación del procesador centralizado clean_text() encargado de eliminar espacios en blanco adicionales (Trim), convertir strings a MAYÚSCULAS y colapsar espacios internos redundantes.</a:t>
-            </a:r>
-          </a:p>
-        </p:txBody>
-      </p:sp>
       <p:pic>
         <p:nvPicPr>
-          <p:cNvPr id="6" name="Picture 5" descr="image.png"/>
+          <p:cNvPr id="3" name="Picture 2" descr="image.png"/>
           <p:cNvPicPr>
             <a:picLocks noChangeAspect="1"/>
           </p:cNvPicPr>
@@ -8105,8 +8285,8 @@
         </p:blipFill>
         <p:spPr>
           <a:xfrm>
-            <a:off x="1333500" y="2731144"/>
-            <a:ext cx="171450" cy="200025"/>
+            <a:off x="762000" y="2574577"/>
+            <a:ext cx="3403550" cy="2371725"/>
           </a:xfrm>
           <a:prstGeom prst="rect">
             <a:avLst/>
@@ -8115,7 +8295,7 @@
       </p:pic>
       <p:pic>
         <p:nvPicPr>
-          <p:cNvPr id="7" name="Picture 6" descr="image.png"/>
+          <p:cNvPr id="4" name="Picture 3" descr="image.png"/>
           <p:cNvPicPr>
             <a:picLocks noChangeAspect="1"/>
           </p:cNvPicPr>
@@ -8129,8 +8309,8 @@
         </p:blipFill>
         <p:spPr>
           <a:xfrm>
-            <a:off x="1333500" y="3439566"/>
-            <a:ext cx="161925" cy="200025"/>
+            <a:off x="4394150" y="2574577"/>
+            <a:ext cx="3403550" cy="2371725"/>
           </a:xfrm>
           <a:prstGeom prst="rect">
             <a:avLst/>
@@ -8139,7 +8319,7 @@
       </p:pic>
       <p:pic>
         <p:nvPicPr>
-          <p:cNvPr id="8" name="Picture 7" descr="image.png"/>
+          <p:cNvPr id="5" name="Picture 4" descr="image.png"/>
           <p:cNvPicPr>
             <a:picLocks noChangeAspect="1"/>
           </p:cNvPicPr>
@@ -8153,8 +8333,8 @@
         </p:blipFill>
         <p:spPr>
           <a:xfrm>
-            <a:off x="1333500" y="4147988"/>
-            <a:ext cx="171450" cy="200025"/>
+            <a:off x="8026300" y="2574577"/>
+            <a:ext cx="3403550" cy="2371725"/>
           </a:xfrm>
           <a:prstGeom prst="rect">
             <a:avLst/>
@@ -8163,7 +8343,301 @@
       </p:pic>
       <p:sp>
         <p:nvSpPr>
+          <p:cNvPr id="6" name="TextBox 5"/>
+          <p:cNvSpPr txBox="1"/>
+          <p:nvPr/>
+        </p:nvSpPr>
+        <p:spPr>
+          <a:xfrm>
+            <a:off x="1057275" y="3441352"/>
+            <a:ext cx="2953650" cy="285750"/>
+          </a:xfrm>
+          <a:prstGeom prst="rect">
+            <a:avLst/>
+          </a:prstGeom>
+          <a:noFill/>
+        </p:spPr>
+        <p:txBody>
+          <a:bodyPr wrap="square" lIns="0" tIns="0" rIns="0" bIns="0" anchor="t">
+            <a:spAutoFit/>
+          </a:bodyPr>
+          <a:lstStyle/>
+          <a:p>
+            <a:pPr algn="l"/>
+            <a:r>
+              <a:rPr sz="1500" b="1" i="0" u="none">
+                <a:solidFill>
+                  <a:srgbClr val="0F172A"/>
+                </a:solidFill>
+                <a:latin typeface="Poppins"/>
+              </a:rPr>
+              <a:t>Llaves Naturales</a:t>
+            </a:r>
+          </a:p>
+        </p:txBody>
+      </p:sp>
+      <p:sp>
+        <p:nvSpPr>
+          <p:cNvPr id="7" name="TextBox 6"/>
+          <p:cNvSpPr txBox="1"/>
+          <p:nvPr/>
+        </p:nvSpPr>
+        <p:spPr>
+          <a:xfrm>
+            <a:off x="1057275" y="3841402"/>
+            <a:ext cx="2813000" cy="800100"/>
+          </a:xfrm>
+          <a:prstGeom prst="rect">
+            <a:avLst/>
+          </a:prstGeom>
+          <a:noFill/>
+        </p:spPr>
+        <p:txBody>
+          <a:bodyPr wrap="square" lIns="0" tIns="0" rIns="0" bIns="0" anchor="t">
+            <a:spAutoFit/>
+          </a:bodyPr>
+          <a:lstStyle/>
+          <a:p>
+            <a:pPr algn="l">
+              <a:lnSpc>
+                <a:spcPts val="1575"/>
+              </a:lnSpc>
+            </a:pPr>
+            <a:r>
+              <a:rPr sz="1050" b="0" i="0" u="none">
+                <a:solidFill>
+                  <a:srgbClr val="64748B"/>
+                </a:solidFill>
+                <a:latin typeface="Inter"/>
+              </a:rPr>
+              <a:t>Uso estricto de claves naturales para evaluar duplicidad: Fecha para series temporales, RUC para empresas, Expediente + Año para el ranking corporativo.</a:t>
+            </a:r>
+          </a:p>
+        </p:txBody>
+      </p:sp>
+      <p:sp>
+        <p:nvSpPr>
+          <p:cNvPr id="8" name="TextBox 7"/>
+          <p:cNvSpPr txBox="1"/>
+          <p:nvPr/>
+        </p:nvSpPr>
+        <p:spPr>
+          <a:xfrm>
+            <a:off x="4689425" y="3441352"/>
+            <a:ext cx="2953650" cy="285750"/>
+          </a:xfrm>
+          <a:prstGeom prst="rect">
+            <a:avLst/>
+          </a:prstGeom>
+          <a:noFill/>
+        </p:spPr>
+        <p:txBody>
+          <a:bodyPr wrap="square" lIns="0" tIns="0" rIns="0" bIns="0" anchor="t">
+            <a:spAutoFit/>
+          </a:bodyPr>
+          <a:lstStyle/>
+          <a:p>
+            <a:pPr algn="l"/>
+            <a:r>
+              <a:rPr sz="1500" b="1" i="0" u="none">
+                <a:solidFill>
+                  <a:srgbClr val="0F172A"/>
+                </a:solidFill>
+                <a:latin typeface="Poppins"/>
+              </a:rPr>
+              <a:t>Módulo Común</a:t>
+            </a:r>
+          </a:p>
+        </p:txBody>
+      </p:sp>
+      <p:sp>
+        <p:nvSpPr>
           <p:cNvPr id="9" name="TextBox 8"/>
+          <p:cNvSpPr txBox="1"/>
+          <p:nvPr/>
+        </p:nvSpPr>
+        <p:spPr>
+          <a:xfrm>
+            <a:off x="4689425" y="3841402"/>
+            <a:ext cx="2813000" cy="809625"/>
+          </a:xfrm>
+          <a:prstGeom prst="rect">
+            <a:avLst/>
+          </a:prstGeom>
+          <a:noFill/>
+        </p:spPr>
+        <p:txBody>
+          <a:bodyPr wrap="square" lIns="0" tIns="0" rIns="0" bIns="0" anchor="t">
+            <a:spAutoFit/>
+          </a:bodyPr>
+          <a:lstStyle/>
+          <a:p>
+            <a:pPr algn="l">
+              <a:lnSpc>
+                <a:spcPts val="1575"/>
+              </a:lnSpc>
+            </a:pPr>
+            <a:r>
+              <a:rPr sz="1050" b="0" i="0" u="none">
+                <a:solidFill>
+                  <a:srgbClr val="64748B"/>
+                </a:solidFill>
+                <a:latin typeface="Inter"/>
+              </a:rPr>
+              <a:t>Implementación de la función centralizada drop_duplicates_report() que audita y reporta los registros repetidos eliminados en tiempo de ejecución.</a:t>
+            </a:r>
+          </a:p>
+        </p:txBody>
+      </p:sp>
+      <p:sp>
+        <p:nvSpPr>
+          <p:cNvPr id="10" name="TextBox 9"/>
+          <p:cNvSpPr txBox="1"/>
+          <p:nvPr/>
+        </p:nvSpPr>
+        <p:spPr>
+          <a:xfrm>
+            <a:off x="8321575" y="3441352"/>
+            <a:ext cx="2953650" cy="285750"/>
+          </a:xfrm>
+          <a:prstGeom prst="rect">
+            <a:avLst/>
+          </a:prstGeom>
+          <a:noFill/>
+        </p:spPr>
+        <p:txBody>
+          <a:bodyPr wrap="square" lIns="0" tIns="0" rIns="0" bIns="0" anchor="t">
+            <a:spAutoFit/>
+          </a:bodyPr>
+          <a:lstStyle/>
+          <a:p>
+            <a:pPr algn="l"/>
+            <a:r>
+              <a:rPr sz="1500" b="1" i="0" u="none">
+                <a:solidFill>
+                  <a:srgbClr val="0F172A"/>
+                </a:solidFill>
+                <a:latin typeface="Poppins"/>
+              </a:rPr>
+              <a:t>Integridad Referencial</a:t>
+            </a:r>
+          </a:p>
+        </p:txBody>
+      </p:sp>
+      <p:sp>
+        <p:nvSpPr>
+          <p:cNvPr id="11" name="TextBox 10"/>
+          <p:cNvSpPr txBox="1"/>
+          <p:nvPr/>
+        </p:nvSpPr>
+        <p:spPr>
+          <a:xfrm>
+            <a:off x="8321575" y="3841402"/>
+            <a:ext cx="2813000" cy="800100"/>
+          </a:xfrm>
+          <a:prstGeom prst="rect">
+            <a:avLst/>
+          </a:prstGeom>
+          <a:noFill/>
+        </p:spPr>
+        <p:txBody>
+          <a:bodyPr wrap="square" lIns="0" tIns="0" rIns="0" bIns="0" anchor="t">
+            <a:spAutoFit/>
+          </a:bodyPr>
+          <a:lstStyle/>
+          <a:p>
+            <a:pPr algn="l">
+              <a:lnSpc>
+                <a:spcPts val="1575"/>
+              </a:lnSpc>
+            </a:pPr>
+            <a:r>
+              <a:rPr sz="1050" b="0" i="0" u="none">
+                <a:solidFill>
+                  <a:srgbClr val="64748B"/>
+                </a:solidFill>
+                <a:latin typeface="Inter"/>
+              </a:rPr>
+              <a:t>Asegura que cada tabla Silver conserve una única fila representativa por entidad, evitando la duplicación de métricas financieras y demográficas.</a:t>
+            </a:r>
+          </a:p>
+        </p:txBody>
+      </p:sp>
+      <p:pic>
+        <p:nvPicPr>
+          <p:cNvPr id="12" name="Picture 11" descr="image.png"/>
+          <p:cNvPicPr>
+            <a:picLocks noChangeAspect="1"/>
+          </p:cNvPicPr>
+          <p:nvPr/>
+        </p:nvPicPr>
+        <p:blipFill>
+          <a:blip r:embed="rId6"/>
+          <a:stretch>
+            <a:fillRect/>
+          </a:stretch>
+        </p:blipFill>
+        <p:spPr>
+          <a:xfrm>
+            <a:off x="1057275" y="2907952"/>
+            <a:ext cx="342900" cy="342900"/>
+          </a:xfrm>
+          <a:prstGeom prst="rect">
+            <a:avLst/>
+          </a:prstGeom>
+        </p:spPr>
+      </p:pic>
+      <p:pic>
+        <p:nvPicPr>
+          <p:cNvPr id="13" name="Picture 12" descr="image.png"/>
+          <p:cNvPicPr>
+            <a:picLocks noChangeAspect="1"/>
+          </p:cNvPicPr>
+          <p:nvPr/>
+        </p:nvPicPr>
+        <p:blipFill>
+          <a:blip r:embed="rId7"/>
+          <a:stretch>
+            <a:fillRect/>
+          </a:stretch>
+        </p:blipFill>
+        <p:spPr>
+          <a:xfrm>
+            <a:off x="4689425" y="2907952"/>
+            <a:ext cx="390525" cy="342900"/>
+          </a:xfrm>
+          <a:prstGeom prst="rect">
+            <a:avLst/>
+          </a:prstGeom>
+        </p:spPr>
+      </p:pic>
+      <p:pic>
+        <p:nvPicPr>
+          <p:cNvPr id="14" name="Picture 13" descr="image.png"/>
+          <p:cNvPicPr>
+            <a:picLocks noChangeAspect="1"/>
+          </p:cNvPicPr>
+          <p:nvPr/>
+        </p:nvPicPr>
+        <p:blipFill>
+          <a:blip r:embed="rId8"/>
+          <a:stretch>
+            <a:fillRect/>
+          </a:stretch>
+        </p:blipFill>
+        <p:spPr>
+          <a:xfrm>
+            <a:off x="8321575" y="2907952"/>
+            <a:ext cx="304800" cy="342900"/>
+          </a:xfrm>
+          <a:prstGeom prst="rect">
+            <a:avLst/>
+          </a:prstGeom>
+        </p:spPr>
+      </p:pic>
+      <p:sp>
+        <p:nvSpPr>
+          <p:cNvPr id="15" name="TextBox 14"/>
           <p:cNvSpPr txBox="1"/>
           <p:nvPr/>
         </p:nvSpPr>
@@ -8195,14 +8669,14 @@
                 </a:solidFill>
                 <a:latin typeface="Poppins"/>
               </a:rPr>
-              <a:t>Regla 3: Estandarización de Formatos de Datos</a:t>
-            </a:r>
-          </a:p>
-        </p:txBody>
-      </p:sp>
-      <p:sp>
-        <p:nvSpPr>
-          <p:cNvPr id="10" name="Rectangle 9"/>
+              <a:t>Regla 2: Eliminación Estratégica de Duplicados</a:t>
+            </a:r>
+          </a:p>
+        </p:txBody>
+      </p:sp>
+      <p:sp>
+        <p:nvSpPr>
+          <p:cNvPr id="16" name="Rectangle 15"/>
           <p:cNvSpPr/>
           <p:nvPr/>
         </p:nvSpPr>
@@ -8310,8 +8784,8 @@
         </p:nvSpPr>
         <p:spPr>
           <a:xfrm>
-            <a:off x="2095500" y="571500"/>
-            <a:ext cx="8001000" cy="200025"/>
+            <a:off x="1676400" y="2697807"/>
+            <a:ext cx="9182100" cy="517921"/>
           </a:xfrm>
           <a:prstGeom prst="rect">
             <a:avLst/>
@@ -8324,15 +8798,28 @@
           </a:bodyPr>
           <a:lstStyle/>
           <a:p>
-            <a:pPr algn="ctr"/>
-            <a:r>
-              <a:rPr sz="1050" b="1" i="0" u="none">
-                <a:solidFill>
-                  <a:srgbClr val="0D9488"/>
-                </a:solidFill>
-                <a:latin typeface="Poppins"/>
+            <a:pPr algn="l">
+              <a:lnSpc>
+                <a:spcPts val="2039"/>
+              </a:lnSpc>
+            </a:pPr>
+            <a:r>
+              <a:rPr sz="1275" b="0" i="0" u="none">
+                <a:solidFill>
+                  <a:srgbClr val="0F172A"/>
+                </a:solidFill>
+                <a:latin typeface="Inter SemiBold"/>
               </a:rPr>
-              <a:t>SECCIÓN 02</a:t>
+              <a:t>Fechas Uniformes:</a:t>
+            </a:r>
+            <a:r>
+              <a:rPr sz="1275" b="0" i="0" u="none">
+                <a:solidFill>
+                  <a:srgbClr val="475569"/>
+                </a:solidFill>
+                <a:latin typeface="Inter"/>
+              </a:rPr>
+              <a:t> Conversión estricta de cadenas de texto y formatos variados a formato estándar ISO AAAA-MM-DD mediante pd.to_datetime().</a:t>
             </a:r>
           </a:p>
         </p:txBody>
@@ -8345,8 +8832,8 @@
         </p:nvSpPr>
         <p:spPr>
           <a:xfrm>
-            <a:off x="2120899" y="771525"/>
-            <a:ext cx="8001000" cy="600164"/>
+            <a:off x="1676400" y="3406229"/>
+            <a:ext cx="9182100" cy="517921"/>
           </a:xfrm>
           <a:prstGeom prst="rect">
             <a:avLst/>
@@ -8359,44 +8846,237 @@
           </a:bodyPr>
           <a:lstStyle/>
           <a:p>
-            <a:pPr algn="ctr"/>
-            <a:r>
-              <a:rPr lang="es-EC" sz="3900" b="1" i="0" u="none" dirty="0" err="1">
+            <a:pPr algn="l">
+              <a:lnSpc>
+                <a:spcPts val="2039"/>
+              </a:lnSpc>
+            </a:pPr>
+            <a:r>
+              <a:rPr sz="1275" b="0" i="0" u="none">
+                <a:solidFill>
+                  <a:srgbClr val="0F172A"/>
+                </a:solidFill>
+                <a:latin typeface="Inter SemiBold"/>
+              </a:rPr>
+              <a:t>Coerción Numérica Segura:</a:t>
+            </a:r>
+            <a:r>
+              <a:rPr sz="1275" b="0" i="0" u="none">
+                <a:solidFill>
+                  <a:srgbClr val="475569"/>
+                </a:solidFill>
+                <a:latin typeface="Inter"/>
+              </a:rPr>
+              <a:t> Implementación de la función personalizada to_numeric_safe() que fuerza valores erróneos, strings vacíos o caracteres inválidos a nulos lógicos (Float/Int).</a:t>
+            </a:r>
+          </a:p>
+        </p:txBody>
+      </p:sp>
+      <p:sp>
+        <p:nvSpPr>
+          <p:cNvPr id="5" name="TextBox 4"/>
+          <p:cNvSpPr txBox="1"/>
+          <p:nvPr/>
+        </p:nvSpPr>
+        <p:spPr>
+          <a:xfrm>
+            <a:off x="1676400" y="4114651"/>
+            <a:ext cx="9182100" cy="517921"/>
+          </a:xfrm>
+          <a:prstGeom prst="rect">
+            <a:avLst/>
+          </a:prstGeom>
+          <a:noFill/>
+        </p:spPr>
+        <p:txBody>
+          <a:bodyPr wrap="square" lIns="0" tIns="0" rIns="0" bIns="0" anchor="t">
+            <a:spAutoFit/>
+          </a:bodyPr>
+          <a:lstStyle/>
+          <a:p>
+            <a:pPr algn="l">
+              <a:lnSpc>
+                <a:spcPts val="2039"/>
+              </a:lnSpc>
+            </a:pPr>
+            <a:r>
+              <a:rPr sz="1275" b="0" i="0" u="none">
+                <a:solidFill>
+                  <a:srgbClr val="0F172A"/>
+                </a:solidFill>
+                <a:latin typeface="Inter SemiBold"/>
+              </a:rPr>
+              <a:t>Normalización de Texto:</a:t>
+            </a:r>
+            <a:r>
+              <a:rPr sz="1275" b="0" i="0" u="none">
+                <a:solidFill>
+                  <a:srgbClr val="475569"/>
+                </a:solidFill>
+                <a:latin typeface="Inter"/>
+              </a:rPr>
+              <a:t> Aplicación del procesador centralizado clean_text() encargado de eliminar espacios en blanco adicionales (Trim), convertir strings a MAYÚSCULAS y colapsar espacios internos redundantes.</a:t>
+            </a:r>
+          </a:p>
+        </p:txBody>
+      </p:sp>
+      <p:pic>
+        <p:nvPicPr>
+          <p:cNvPr id="6" name="Picture 5" descr="image.png"/>
+          <p:cNvPicPr>
+            <a:picLocks noChangeAspect="1"/>
+          </p:cNvPicPr>
+          <p:nvPr/>
+        </p:nvPicPr>
+        <p:blipFill>
+          <a:blip r:embed="rId3"/>
+          <a:stretch>
+            <a:fillRect/>
+          </a:stretch>
+        </p:blipFill>
+        <p:spPr>
+          <a:xfrm>
+            <a:off x="1333500" y="2731144"/>
+            <a:ext cx="171450" cy="200025"/>
+          </a:xfrm>
+          <a:prstGeom prst="rect">
+            <a:avLst/>
+          </a:prstGeom>
+        </p:spPr>
+      </p:pic>
+      <p:pic>
+        <p:nvPicPr>
+          <p:cNvPr id="7" name="Picture 6" descr="image.png"/>
+          <p:cNvPicPr>
+            <a:picLocks noChangeAspect="1"/>
+          </p:cNvPicPr>
+          <p:nvPr/>
+        </p:nvPicPr>
+        <p:blipFill>
+          <a:blip r:embed="rId4"/>
+          <a:stretch>
+            <a:fillRect/>
+          </a:stretch>
+        </p:blipFill>
+        <p:spPr>
+          <a:xfrm>
+            <a:off x="1333500" y="3439566"/>
+            <a:ext cx="161925" cy="200025"/>
+          </a:xfrm>
+          <a:prstGeom prst="rect">
+            <a:avLst/>
+          </a:prstGeom>
+        </p:spPr>
+      </p:pic>
+      <p:pic>
+        <p:nvPicPr>
+          <p:cNvPr id="8" name="Picture 7" descr="image.png"/>
+          <p:cNvPicPr>
+            <a:picLocks noChangeAspect="1"/>
+          </p:cNvPicPr>
+          <p:nvPr/>
+        </p:nvPicPr>
+        <p:blipFill>
+          <a:blip r:embed="rId5"/>
+          <a:stretch>
+            <a:fillRect/>
+          </a:stretch>
+        </p:blipFill>
+        <p:spPr>
+          <a:xfrm>
+            <a:off x="1333500" y="4147988"/>
+            <a:ext cx="171450" cy="200025"/>
+          </a:xfrm>
+          <a:prstGeom prst="rect">
+            <a:avLst/>
+          </a:prstGeom>
+        </p:spPr>
+      </p:pic>
+      <p:sp>
+        <p:nvSpPr>
+          <p:cNvPr id="9" name="TextBox 8"/>
+          <p:cNvSpPr txBox="1"/>
+          <p:nvPr/>
+        </p:nvSpPr>
+        <p:spPr>
+          <a:xfrm>
+            <a:off x="914400" y="571500"/>
+            <a:ext cx="11041380" cy="434280"/>
+          </a:xfrm>
+          <a:prstGeom prst="rect">
+            <a:avLst/>
+          </a:prstGeom>
+          <a:noFill/>
+        </p:spPr>
+        <p:txBody>
+          <a:bodyPr wrap="square" lIns="0" tIns="0" rIns="0" bIns="0" anchor="ctr">
+            <a:spAutoFit/>
+          </a:bodyPr>
+          <a:lstStyle/>
+          <a:p>
+            <a:pPr algn="l">
+              <a:lnSpc>
+                <a:spcPts val="3420"/>
+              </a:lnSpc>
+            </a:pPr>
+            <a:r>
+              <a:rPr sz="2850" b="1" i="0" u="none" dirty="0">
                 <a:solidFill>
                   <a:srgbClr val="0F172A"/>
                 </a:solidFill>
                 <a:latin typeface="Poppins"/>
               </a:rPr>
-              <a:t>Insercción</a:t>
-            </a:r>
-            <a:r>
-              <a:rPr lang="es-EC" sz="3900" b="1" i="0" u="none" dirty="0">
+              <a:t>Regla 3: </a:t>
+            </a:r>
+            <a:r>
+              <a:rPr sz="2850" b="1" i="0" u="none" dirty="0" err="1">
                 <a:solidFill>
                   <a:srgbClr val="0F172A"/>
                 </a:solidFill>
                 <a:latin typeface="Poppins"/>
               </a:rPr>
-              <a:t> de RPA</a:t>
-            </a:r>
-            <a:endParaRPr sz="3900" b="1" i="0" u="none" dirty="0">
-              <a:solidFill>
-                <a:srgbClr val="0F172A"/>
-              </a:solidFill>
-              <a:latin typeface="Poppins"/>
-            </a:endParaRPr>
-          </a:p>
-        </p:txBody>
-      </p:sp>
-      <p:sp>
-        <p:nvSpPr>
-          <p:cNvPr id="5" name="Rectangle 4"/>
+              <a:t>Estandarización</a:t>
+            </a:r>
+            <a:r>
+              <a:rPr sz="2850" b="1" i="0" u="none" dirty="0">
+                <a:solidFill>
+                  <a:srgbClr val="0F172A"/>
+                </a:solidFill>
+                <a:latin typeface="Poppins"/>
+              </a:rPr>
+              <a:t> de </a:t>
+            </a:r>
+            <a:r>
+              <a:rPr sz="2850" b="1" i="0" u="none" dirty="0" err="1">
+                <a:solidFill>
+                  <a:srgbClr val="0F172A"/>
+                </a:solidFill>
+                <a:latin typeface="Poppins"/>
+              </a:rPr>
+              <a:t>Formatos</a:t>
+            </a:r>
+            <a:r>
+              <a:rPr sz="2850" b="1" i="0" u="none" dirty="0">
+                <a:solidFill>
+                  <a:srgbClr val="0F172A"/>
+                </a:solidFill>
+                <a:latin typeface="Poppins"/>
+              </a:rPr>
+              <a:t> de Datos</a:t>
+            </a:r>
+          </a:p>
+        </p:txBody>
+      </p:sp>
+      <p:sp>
+        <p:nvSpPr>
+          <p:cNvPr id="10" name="Rectangle 9"/>
           <p:cNvSpPr/>
           <p:nvPr/>
         </p:nvSpPr>
         <p:spPr>
           <a:xfrm>
-            <a:off x="5524500" y="2600325"/>
-            <a:ext cx="1143000" cy="38100"/>
+            <a:off x="762000" y="571500"/>
+            <a:ext cx="57150" cy="434280"/>
           </a:xfrm>
           <a:prstGeom prst="rect">
             <a:avLst/>
@@ -8432,36 +9112,6 @@
           </a:p>
         </p:txBody>
       </p:sp>
-      <p:pic>
-        <p:nvPicPr>
-          <p:cNvPr id="8" name="Imagen 7">
-            <a:extLst>
-              <a:ext uri="{FF2B5EF4-FFF2-40B4-BE49-F238E27FC236}">
-                <a16:creationId xmlns:a16="http://schemas.microsoft.com/office/drawing/2014/main" id="{0728AD33-6A23-8FB2-503F-564E1F014656}"/>
-              </a:ext>
-            </a:extLst>
-          </p:cNvPr>
-          <p:cNvPicPr>
-            <a:picLocks noChangeAspect="1"/>
-          </p:cNvPicPr>
-          <p:nvPr/>
-        </p:nvPicPr>
-        <p:blipFill>
-          <a:blip r:embed="rId3"/>
-          <a:stretch>
-            <a:fillRect/>
-          </a:stretch>
-        </p:blipFill>
-        <p:spPr>
-          <a:xfrm>
-            <a:off x="2192867" y="2182628"/>
-            <a:ext cx="8119532" cy="4389622"/>
-          </a:xfrm>
-          <a:prstGeom prst="rect">
-            <a:avLst/>
-          </a:prstGeom>
-        </p:spPr>
-      </p:pic>
     </p:spTree>
   </p:cSld>
   <p:clrMapOvr>
@@ -8473,14 +9123,6 @@
 <file path=ppt/slides/slide9.xml><?xml version="1.0" encoding="utf-8"?>
 <p:sld xmlns:a="http://schemas.openxmlformats.org/drawingml/2006/main" xmlns:r="http://schemas.openxmlformats.org/officeDocument/2006/relationships" xmlns:p="http://schemas.openxmlformats.org/presentationml/2006/main">
   <p:cSld>
-    <p:bg>
-      <p:bgPr>
-        <a:solidFill>
-          <a:srgbClr val="F8FAFC"/>
-        </a:solidFill>
-        <a:effectLst/>
-      </p:bgPr>
-    </p:bg>
     <p:spTree>
       <p:nvGrpSpPr>
         <p:cNvPr id="1" name=""/>
@@ -8497,7 +9139,13 @@
       </p:grpSpPr>
       <p:pic>
         <p:nvPicPr>
-          <p:cNvPr id="2" name="Picture 1" descr="image.png"/>
+          <p:cNvPr id="5" name="Imagen 4">
+            <a:extLst>
+              <a:ext uri="{FF2B5EF4-FFF2-40B4-BE49-F238E27FC236}">
+                <a16:creationId xmlns:a16="http://schemas.microsoft.com/office/drawing/2014/main" id="{A7D24B72-F79C-5E76-FC74-C8F734CAB11D}"/>
+              </a:ext>
+            </a:extLst>
+          </p:cNvPr>
           <p:cNvPicPr>
             <a:picLocks noChangeAspect="1"/>
           </p:cNvPicPr>
@@ -8511,8 +9159,8 @@
         </p:blipFill>
         <p:spPr>
           <a:xfrm>
-            <a:off x="0" y="0"/>
-            <a:ext cx="12192000" cy="6858000"/>
+            <a:off x="622570" y="850280"/>
+            <a:ext cx="10411838" cy="2653997"/>
           </a:xfrm>
           <a:prstGeom prst="rect">
             <a:avLst/>
@@ -8521,7 +9169,13 @@
       </p:pic>
       <p:pic>
         <p:nvPicPr>
-          <p:cNvPr id="3" name="Picture 2" descr="image.png"/>
+          <p:cNvPr id="7" name="Imagen 6">
+            <a:extLst>
+              <a:ext uri="{FF2B5EF4-FFF2-40B4-BE49-F238E27FC236}">
+                <a16:creationId xmlns:a16="http://schemas.microsoft.com/office/drawing/2014/main" id="{AD1F177F-F270-0B33-76C3-A68B147D94C3}"/>
+              </a:ext>
+            </a:extLst>
+          </p:cNvPr>
           <p:cNvPicPr>
             <a:picLocks noChangeAspect="1"/>
           </p:cNvPicPr>
@@ -8535,8 +9189,8 @@
         </p:blipFill>
         <p:spPr>
           <a:xfrm>
-            <a:off x="6286500" y="1950690"/>
-            <a:ext cx="5143500" cy="3619500"/>
+            <a:off x="1887166" y="3429000"/>
+            <a:ext cx="9837905" cy="3312315"/>
           </a:xfrm>
           <a:prstGeom prst="rect">
             <a:avLst/>
@@ -8545,308 +9199,10 @@
       </p:pic>
       <p:sp>
         <p:nvSpPr>
-          <p:cNvPr id="4" name="TextBox 3"/>
-          <p:cNvSpPr txBox="1"/>
-          <p:nvPr/>
-        </p:nvSpPr>
-        <p:spPr>
-          <a:xfrm>
-            <a:off x="762000" y="2173783"/>
-            <a:ext cx="5400675" cy="276225"/>
-          </a:xfrm>
-          <a:prstGeom prst="rect">
-            <a:avLst/>
-          </a:prstGeom>
-          <a:noFill/>
-        </p:spPr>
-        <p:txBody>
-          <a:bodyPr wrap="square" lIns="257175" tIns="0" rIns="0" bIns="0" anchor="t">
-            <a:spAutoFit/>
-          </a:bodyPr>
-          <a:lstStyle/>
-          <a:p>
-            <a:pPr algn="l"/>
-            <a:r>
-              <a:rPr sz="1404" b="1" i="0" u="none">
-                <a:solidFill>
-                  <a:srgbClr val="E11D48"/>
-                </a:solidFill>
-                <a:latin typeface="Poppins"/>
-              </a:rPr>
-              <a:t>Corrupción de Nombres en INEC</a:t>
-            </a:r>
-          </a:p>
-        </p:txBody>
-      </p:sp>
-      <p:sp>
-        <p:nvSpPr>
-          <p:cNvPr id="5" name="TextBox 4"/>
-          <p:cNvSpPr txBox="1"/>
-          <p:nvPr/>
-        </p:nvSpPr>
-        <p:spPr>
-          <a:xfrm>
-            <a:off x="762000" y="2602408"/>
-            <a:ext cx="5143500" cy="975121"/>
-          </a:xfrm>
-          <a:prstGeom prst="rect">
-            <a:avLst/>
-          </a:prstGeom>
-          <a:noFill/>
-        </p:spPr>
-        <p:txBody>
-          <a:bodyPr wrap="square" lIns="0" tIns="0" rIns="0" bIns="0" anchor="t">
-            <a:spAutoFit/>
-          </a:bodyPr>
-          <a:lstStyle/>
-          <a:p>
-            <a:pPr algn="l">
-              <a:lnSpc>
-                <a:spcPts val="1920"/>
-              </a:lnSpc>
-            </a:pPr>
-            <a:r>
-              <a:rPr sz="1200" b="0" i="0" u="none">
-                <a:solidFill>
-                  <a:srgbClr val="475569"/>
-                </a:solidFill>
-                <a:latin typeface="Inter"/>
-              </a:rPr>
-              <a:t>El indicador INEC_ENEMDU_POBLACIONES importaba caracteres corruptos (ej. </a:t>
-            </a:r>
-            <a:r>
-              <a:rPr sz="1200" b="0" i="0" u="none">
-                <a:solidFill>
-                  <a:srgbClr val="0F172A"/>
-                </a:solidFill>
-                <a:latin typeface="Inter SemiBold"/>
-              </a:rPr>
-              <a:t>"Poblacin Total"</a:t>
-            </a:r>
-            <a:r>
-              <a:rPr sz="1200" b="0" i="0" u="none">
-                <a:solidFill>
-                  <a:srgbClr val="475569"/>
-                </a:solidFill>
-                <a:latin typeface="Inter"/>
-              </a:rPr>
-              <a:t>) debido a la omisión de la configuración del set de caracteres adecuado durante la carga de SQL*Plus original.</a:t>
-            </a:r>
-          </a:p>
-        </p:txBody>
-      </p:sp>
-      <p:sp>
-        <p:nvSpPr>
-          <p:cNvPr id="6" name="TextBox 5"/>
-          <p:cNvSpPr txBox="1"/>
-          <p:nvPr/>
-        </p:nvSpPr>
-        <p:spPr>
-          <a:xfrm>
-            <a:off x="762000" y="3806130"/>
-            <a:ext cx="5400675" cy="276225"/>
-          </a:xfrm>
-          <a:prstGeom prst="rect">
-            <a:avLst/>
-          </a:prstGeom>
-          <a:noFill/>
-        </p:spPr>
-        <p:txBody>
-          <a:bodyPr wrap="square" lIns="257175" tIns="0" rIns="0" bIns="0" anchor="t">
-            <a:spAutoFit/>
-          </a:bodyPr>
-          <a:lstStyle/>
-          <a:p>
-            <a:pPr algn="l"/>
-            <a:r>
-              <a:rPr sz="1404" b="1" i="0" u="none">
-                <a:solidFill>
-                  <a:srgbClr val="0D9488"/>
-                </a:solidFill>
-                <a:latin typeface="Poppins"/>
-              </a:rPr>
-              <a:t>Acción Correctiva Aplicada</a:t>
-            </a:r>
-          </a:p>
-        </p:txBody>
-      </p:sp>
-      <p:sp>
-        <p:nvSpPr>
-          <p:cNvPr id="7" name="TextBox 6"/>
-          <p:cNvSpPr txBox="1"/>
-          <p:nvPr/>
-        </p:nvSpPr>
-        <p:spPr>
-          <a:xfrm>
-            <a:off x="762000" y="4234755"/>
-            <a:ext cx="5143500" cy="731341"/>
-          </a:xfrm>
-          <a:prstGeom prst="rect">
-            <a:avLst/>
-          </a:prstGeom>
-          <a:noFill/>
-        </p:spPr>
-        <p:txBody>
-          <a:bodyPr wrap="square" lIns="0" tIns="0" rIns="0" bIns="0" anchor="t">
-            <a:spAutoFit/>
-          </a:bodyPr>
-          <a:lstStyle/>
-          <a:p>
-            <a:pPr algn="l">
-              <a:lnSpc>
-                <a:spcPts val="1920"/>
-              </a:lnSpc>
-            </a:pPr>
-            <a:r>
-              <a:rPr sz="1200" b="0" i="0" u="none">
-                <a:solidFill>
-                  <a:srgbClr val="475569"/>
-                </a:solidFill>
-                <a:latin typeface="Inter"/>
-              </a:rPr>
-              <a:t>La solución definitiva requiere forzar la variable de entorno del cliente SQL*Plus previa a la carga con la configuración de idioma y encoding regional adecuada para UTF-8:</a:t>
-            </a:r>
-          </a:p>
-        </p:txBody>
-      </p:sp>
-      <p:pic>
-        <p:nvPicPr>
-          <p:cNvPr id="8" name="Picture 7" descr="image.png"/>
-          <p:cNvPicPr>
-            <a:picLocks noChangeAspect="1"/>
-          </p:cNvPicPr>
-          <p:nvPr/>
-        </p:nvPicPr>
-        <p:blipFill>
-          <a:blip r:embed="rId4"/>
-          <a:stretch>
-            <a:fillRect/>
-          </a:stretch>
-        </p:blipFill>
-        <p:spPr>
-          <a:xfrm>
-            <a:off x="762000" y="2221408"/>
-            <a:ext cx="180975" cy="178296"/>
-          </a:xfrm>
-          <a:prstGeom prst="rect">
-            <a:avLst/>
-          </a:prstGeom>
-        </p:spPr>
-      </p:pic>
-      <p:pic>
-        <p:nvPicPr>
-          <p:cNvPr id="9" name="Picture 8" descr="image.png"/>
-          <p:cNvPicPr>
-            <a:picLocks noChangeAspect="1"/>
-          </p:cNvPicPr>
-          <p:nvPr/>
-        </p:nvPicPr>
-        <p:blipFill>
-          <a:blip r:embed="rId5"/>
-          <a:stretch>
-            <a:fillRect/>
-          </a:stretch>
-        </p:blipFill>
-        <p:spPr>
-          <a:xfrm>
-            <a:off x="762000" y="3853755"/>
-            <a:ext cx="180975" cy="178296"/>
-          </a:xfrm>
-          <a:prstGeom prst="rect">
-            <a:avLst/>
-          </a:prstGeom>
-        </p:spPr>
-      </p:pic>
-      <p:sp>
-        <p:nvSpPr>
-          <p:cNvPr id="11" name="TextBox 10"/>
-          <p:cNvSpPr txBox="1"/>
-          <p:nvPr/>
-        </p:nvSpPr>
-        <p:spPr>
-          <a:xfrm>
-            <a:off x="914400" y="571500"/>
-            <a:ext cx="11041380" cy="434280"/>
-          </a:xfrm>
-          <a:prstGeom prst="rect">
-            <a:avLst/>
-          </a:prstGeom>
-          <a:noFill/>
-        </p:spPr>
-        <p:txBody>
-          <a:bodyPr wrap="square" lIns="0" tIns="0" rIns="0" bIns="0" anchor="ctr">
-            <a:spAutoFit/>
-          </a:bodyPr>
-          <a:lstStyle/>
-          <a:p>
-            <a:pPr algn="l">
-              <a:lnSpc>
-                <a:spcPts val="3420"/>
-              </a:lnSpc>
-            </a:pPr>
-            <a:r>
-              <a:rPr sz="2850" b="1" i="0" u="none">
-                <a:solidFill>
-                  <a:srgbClr val="0F172A"/>
-                </a:solidFill>
-                <a:latin typeface="Poppins"/>
-              </a:rPr>
-              <a:t>Bug de Codificación Detectado &amp; Solucionado</a:t>
-            </a:r>
-          </a:p>
-        </p:txBody>
-      </p:sp>
-      <p:sp>
-        <p:nvSpPr>
-          <p:cNvPr id="12" name="Rectangle 11"/>
-          <p:cNvSpPr/>
-          <p:nvPr/>
-        </p:nvSpPr>
-        <p:spPr>
-          <a:xfrm>
-            <a:off x="762000" y="571500"/>
-            <a:ext cx="57150" cy="434280"/>
-          </a:xfrm>
-          <a:prstGeom prst="rect">
-            <a:avLst/>
-          </a:prstGeom>
-          <a:solidFill>
-            <a:srgbClr val="0D9488"/>
-          </a:solidFill>
-          <a:ln>
-            <a:noFill/>
-          </a:ln>
-          <a:effectLst/>
-        </p:spPr>
-        <p:style>
-          <a:lnRef idx="1">
-            <a:schemeClr val="accent1"/>
-          </a:lnRef>
-          <a:fillRef idx="3">
-            <a:schemeClr val="accent1"/>
-          </a:fillRef>
-          <a:effectRef idx="2">
-            <a:schemeClr val="accent1"/>
-          </a:effectRef>
-          <a:fontRef idx="minor">
-            <a:schemeClr val="lt1"/>
-          </a:fontRef>
-        </p:style>
-        <p:txBody>
-          <a:bodyPr rtlCol="0" anchor="ctr"/>
-          <a:lstStyle/>
-          <a:p>
-            <a:pPr algn="ctr"/>
-            <a:endParaRPr/>
-          </a:p>
-        </p:txBody>
-      </p:sp>
-      <p:sp>
-        <p:nvSpPr>
-          <p:cNvPr id="14" name="CuadroTexto 13">
+          <p:cNvPr id="8" name="CuadroTexto 7">
             <a:extLst>
               <a:ext uri="{FF2B5EF4-FFF2-40B4-BE49-F238E27FC236}">
-                <a16:creationId xmlns:a16="http://schemas.microsoft.com/office/drawing/2014/main" id="{B41CA86B-CA56-A1F2-BE9E-1901BE020680}"/>
+                <a16:creationId xmlns:a16="http://schemas.microsoft.com/office/drawing/2014/main" id="{00419F19-CA86-7C22-36E5-AF5A4BA54BCF}"/>
               </a:ext>
             </a:extLst>
           </p:cNvPr>
@@ -8855,8 +9211,8 @@
         </p:nvSpPr>
         <p:spPr>
           <a:xfrm>
-            <a:off x="8280400" y="3068925"/>
-            <a:ext cx="1676400" cy="1569660"/>
+            <a:off x="1459148" y="311445"/>
+            <a:ext cx="4902741" cy="369332"/>
           </a:xfrm>
           <a:prstGeom prst="rect">
             <a:avLst/>
@@ -8864,19 +9220,25 @@
           <a:noFill/>
         </p:spPr>
         <p:txBody>
-          <a:bodyPr wrap="square">
+          <a:bodyPr wrap="square" rtlCol="0">
             <a:spAutoFit/>
           </a:bodyPr>
           <a:lstStyle/>
           <a:p>
             <a:r>
-              <a:rPr lang="en-US" sz="9600" dirty="0"/>
-              <a:t>�</a:t>
-            </a:r>
+              <a:rPr lang="es-EC" b="1" dirty="0"/>
+              <a:t>Comprobación de datos</a:t>
+            </a:r>
+            <a:endParaRPr lang="en-US" b="1" dirty="0"/>
           </a:p>
         </p:txBody>
       </p:sp>
     </p:spTree>
+    <p:extLst>
+      <p:ext uri="{BB962C8B-B14F-4D97-AF65-F5344CB8AC3E}">
+        <p14:creationId xmlns:p14="http://schemas.microsoft.com/office/powerpoint/2010/main" val="4353125"/>
+      </p:ext>
+    </p:extLst>
   </p:cSld>
   <p:clrMapOvr>
     <a:masterClrMapping/>
